--- a/training/English (en)/Refinement and Publication Training [R&P]/Reviewers' Guide/Reviewers' Guide WT Slides.pptx
+++ b/training/English (en)/Refinement and Publication Training [R&P]/Reviewers' Guide/Reviewers' Guide WT Slides.pptx
@@ -147,6 +147,204 @@
 </p:cmAuthorLst>
 </file>
 
+<file path=ppt/revisionInfo.xml><?xml version="1.0" encoding="utf-8"?>
+<p1510:revInfo xmlns:a="http://schemas.openxmlformats.org/drawingml/2006/main" xmlns:r="http://schemas.openxmlformats.org/officeDocument/2006/relationships" xmlns:p1510="http://schemas.microsoft.com/office/powerpoint/2015/10/main">
+  <p1510:revLst>
+    <p1510:client id="{0DC18A87-C19B-1F38-5589-70012B675DB3}" v="27" dt="2026-05-04T19:49:13.694"/>
+    <p1510:client id="{68942F92-4A19-407F-496A-26C8396B9413}" v="47" dt="2026-05-04T19:59:15.580"/>
+  </p1510:revLst>
+</p1510:revInfo>
+</file>
+
+<file path=ppt/changesInfos/changesInfo1.xml><?xml version="1.0" encoding="utf-8"?>
+<pc:chgInfo xmlns:a="http://schemas.openxmlformats.org/drawingml/2006/main" xmlns:r="http://schemas.openxmlformats.org/officeDocument/2006/relationships" xmlns:ac="http://schemas.microsoft.com/office/drawing/2013/main/command" xmlns:pc="http://schemas.microsoft.com/office/powerpoint/2013/main/command">
+  <pc:docChgLst>
+    <pc:chgData name="Deborah Shaw" userId="79bf7848-a030-4096-934a-3abbfde4984a" providerId="ADAL" clId="{8DE9E9FB-001C-4B84-83DE-E1F7ABB9FAA3}"/>
+    <pc:docChg chg="modSld">
+      <pc:chgData name="Deborah Shaw" userId="79bf7848-a030-4096-934a-3abbfde4984a" providerId="ADAL" clId="{8DE9E9FB-001C-4B84-83DE-E1F7ABB9FAA3}" dt="2026-05-04T20:01:30.410" v="9" actId="1076"/>
+      <pc:docMkLst>
+        <pc:docMk/>
+      </pc:docMkLst>
+      <pc:sldChg chg="modSp mod modAnim">
+        <pc:chgData name="Deborah Shaw" userId="79bf7848-a030-4096-934a-3abbfde4984a" providerId="ADAL" clId="{8DE9E9FB-001C-4B84-83DE-E1F7ABB9FAA3}" dt="2026-05-04T20:01:30.410" v="9" actId="1076"/>
+        <pc:sldMkLst>
+          <pc:docMk/>
+          <pc:sldMk cId="1065076301" sldId="302"/>
+        </pc:sldMkLst>
+        <pc:spChg chg="mod">
+          <ac:chgData name="Deborah Shaw" userId="79bf7848-a030-4096-934a-3abbfde4984a" providerId="ADAL" clId="{8DE9E9FB-001C-4B84-83DE-E1F7ABB9FAA3}" dt="2026-05-04T20:00:38.126" v="3" actId="14100"/>
+          <ac:spMkLst>
+            <pc:docMk/>
+            <pc:sldMk cId="1065076301" sldId="302"/>
+            <ac:spMk id="2" creationId="{05CD407E-E7F1-5851-A154-9948961DA25A}"/>
+          </ac:spMkLst>
+        </pc:spChg>
+        <pc:spChg chg="mod">
+          <ac:chgData name="Deborah Shaw" userId="79bf7848-a030-4096-934a-3abbfde4984a" providerId="ADAL" clId="{8DE9E9FB-001C-4B84-83DE-E1F7ABB9FAA3}" dt="2026-05-04T20:00:58.025" v="6" actId="1076"/>
+          <ac:spMkLst>
+            <pc:docMk/>
+            <pc:sldMk cId="1065076301" sldId="302"/>
+            <ac:spMk id="11" creationId="{24F49C6F-3DEE-94D4-E8F4-4CFD0F1F3254}"/>
+          </ac:spMkLst>
+        </pc:spChg>
+        <pc:spChg chg="mod">
+          <ac:chgData name="Deborah Shaw" userId="79bf7848-a030-4096-934a-3abbfde4984a" providerId="ADAL" clId="{8DE9E9FB-001C-4B84-83DE-E1F7ABB9FAA3}" dt="2026-05-04T20:00:48.760" v="4" actId="1076"/>
+          <ac:spMkLst>
+            <pc:docMk/>
+            <pc:sldMk cId="1065076301" sldId="302"/>
+            <ac:spMk id="12" creationId="{D415D071-5A0C-1B65-538A-D43349638B3F}"/>
+          </ac:spMkLst>
+        </pc:spChg>
+        <pc:grpChg chg="mod">
+          <ac:chgData name="Deborah Shaw" userId="79bf7848-a030-4096-934a-3abbfde4984a" providerId="ADAL" clId="{8DE9E9FB-001C-4B84-83DE-E1F7ABB9FAA3}" dt="2026-05-04T20:01:13.943" v="8" actId="1076"/>
+          <ac:grpSpMkLst>
+            <pc:docMk/>
+            <pc:sldMk cId="1065076301" sldId="302"/>
+            <ac:grpSpMk id="14" creationId="{39528F37-A9FE-7A9A-26EA-D357E97F9902}"/>
+          </ac:grpSpMkLst>
+        </pc:grpChg>
+        <pc:grpChg chg="mod">
+          <ac:chgData name="Deborah Shaw" userId="79bf7848-a030-4096-934a-3abbfde4984a" providerId="ADAL" clId="{8DE9E9FB-001C-4B84-83DE-E1F7ABB9FAA3}" dt="2026-05-04T20:01:30.410" v="9" actId="1076"/>
+          <ac:grpSpMkLst>
+            <pc:docMk/>
+            <pc:sldMk cId="1065076301" sldId="302"/>
+            <ac:grpSpMk id="15" creationId="{C5780491-5B3B-632B-323B-8198FCBA6C0E}"/>
+          </ac:grpSpMkLst>
+        </pc:grpChg>
+      </pc:sldChg>
+    </pc:docChg>
+  </pc:docChgLst>
+  <pc:docChgLst>
+    <pc:chgData name="Deborah Shaw" userId="S::deborah_shaw@wycliffeassociates.org::79bf7848-a030-4096-934a-3abbfde4984a" providerId="AD" clId="Web-{0DC18A87-C19B-1F38-5589-70012B675DB3}"/>
+    <pc:docChg chg="modSld">
+      <pc:chgData name="Deborah Shaw" userId="S::deborah_shaw@wycliffeassociates.org::79bf7848-a030-4096-934a-3abbfde4984a" providerId="AD" clId="Web-{0DC18A87-C19B-1F38-5589-70012B675DB3}" dt="2026-05-04T19:49:08.382" v="21" actId="20577"/>
+      <pc:docMkLst>
+        <pc:docMk/>
+      </pc:docMkLst>
+      <pc:sldChg chg="addSp delSp modSp">
+        <pc:chgData name="Deborah Shaw" userId="S::deborah_shaw@wycliffeassociates.org::79bf7848-a030-4096-934a-3abbfde4984a" providerId="AD" clId="Web-{0DC18A87-C19B-1F38-5589-70012B675DB3}" dt="2026-05-04T19:49:08.382" v="21" actId="20577"/>
+        <pc:sldMkLst>
+          <pc:docMk/>
+          <pc:sldMk cId="1065076301" sldId="302"/>
+        </pc:sldMkLst>
+        <pc:spChg chg="topLvl">
+          <ac:chgData name="Deborah Shaw" userId="S::deborah_shaw@wycliffeassociates.org::79bf7848-a030-4096-934a-3abbfde4984a" providerId="AD" clId="Web-{0DC18A87-C19B-1F38-5589-70012B675DB3}" dt="2026-05-04T19:46:19.303" v="8"/>
+          <ac:spMkLst>
+            <pc:docMk/>
+            <pc:sldMk cId="1065076301" sldId="302"/>
+            <ac:spMk id="6" creationId="{65DAADAD-E689-4BBB-D4F1-8115B62C08D2}"/>
+          </ac:spMkLst>
+        </pc:spChg>
+        <pc:spChg chg="mod">
+          <ac:chgData name="Deborah Shaw" userId="S::deborah_shaw@wycliffeassociates.org::79bf7848-a030-4096-934a-3abbfde4984a" providerId="AD" clId="Web-{0DC18A87-C19B-1F38-5589-70012B675DB3}" dt="2026-05-04T19:48:45.366" v="19" actId="1076"/>
+          <ac:spMkLst>
+            <pc:docMk/>
+            <pc:sldMk cId="1065076301" sldId="302"/>
+            <ac:spMk id="11" creationId="{24F49C6F-3DEE-94D4-E8F4-4CFD0F1F3254}"/>
+          </ac:spMkLst>
+        </pc:spChg>
+        <pc:spChg chg="mod">
+          <ac:chgData name="Deborah Shaw" userId="S::deborah_shaw@wycliffeassociates.org::79bf7848-a030-4096-934a-3abbfde4984a" providerId="AD" clId="Web-{0DC18A87-C19B-1F38-5589-70012B675DB3}" dt="2026-05-04T19:49:08.382" v="21" actId="20577"/>
+          <ac:spMkLst>
+            <pc:docMk/>
+            <pc:sldMk cId="1065076301" sldId="302"/>
+            <ac:spMk id="12" creationId="{D415D071-5A0C-1B65-538A-D43349638B3F}"/>
+          </ac:spMkLst>
+        </pc:spChg>
+        <pc:grpChg chg="add del mod">
+          <ac:chgData name="Deborah Shaw" userId="S::deborah_shaw@wycliffeassociates.org::79bf7848-a030-4096-934a-3abbfde4984a" providerId="AD" clId="Web-{0DC18A87-C19B-1F38-5589-70012B675DB3}" dt="2026-05-04T19:46:19.303" v="8"/>
+          <ac:grpSpMkLst>
+            <pc:docMk/>
+            <pc:sldMk cId="1065076301" sldId="302"/>
+            <ac:grpSpMk id="13" creationId="{770D4981-6770-9400-F184-56D9DA4AFE75}"/>
+          </ac:grpSpMkLst>
+        </pc:grpChg>
+        <pc:grpChg chg="add mod">
+          <ac:chgData name="Deborah Shaw" userId="S::deborah_shaw@wycliffeassociates.org::79bf7848-a030-4096-934a-3abbfde4984a" providerId="AD" clId="Web-{0DC18A87-C19B-1F38-5589-70012B675DB3}" dt="2026-05-04T19:45:41.131" v="3" actId="1076"/>
+          <ac:grpSpMkLst>
+            <pc:docMk/>
+            <pc:sldMk cId="1065076301" sldId="302"/>
+            <ac:grpSpMk id="14" creationId="{39528F37-A9FE-7A9A-26EA-D357E97F9902}"/>
+          </ac:grpSpMkLst>
+        </pc:grpChg>
+        <pc:grpChg chg="add mod">
+          <ac:chgData name="Deborah Shaw" userId="S::deborah_shaw@wycliffeassociates.org::79bf7848-a030-4096-934a-3abbfde4984a" providerId="AD" clId="Web-{0DC18A87-C19B-1F38-5589-70012B675DB3}" dt="2026-05-04T19:48:24.897" v="17" actId="1076"/>
+          <ac:grpSpMkLst>
+            <pc:docMk/>
+            <pc:sldMk cId="1065076301" sldId="302"/>
+            <ac:grpSpMk id="15" creationId="{C5780491-5B3B-632B-323B-8198FCBA6C0E}"/>
+          </ac:grpSpMkLst>
+        </pc:grpChg>
+        <pc:picChg chg="topLvl">
+          <ac:chgData name="Deborah Shaw" userId="S::deborah_shaw@wycliffeassociates.org::79bf7848-a030-4096-934a-3abbfde4984a" providerId="AD" clId="Web-{0DC18A87-C19B-1F38-5589-70012B675DB3}" dt="2026-05-04T19:46:19.303" v="8"/>
+          <ac:picMkLst>
+            <pc:docMk/>
+            <pc:sldMk cId="1065076301" sldId="302"/>
+            <ac:picMk id="7" creationId="{78EE56C4-9B8D-E190-FFFE-EB268FE0A7E0}"/>
+          </ac:picMkLst>
+        </pc:picChg>
+        <pc:picChg chg="mod topLvl">
+          <ac:chgData name="Deborah Shaw" userId="S::deborah_shaw@wycliffeassociates.org::79bf7848-a030-4096-934a-3abbfde4984a" providerId="AD" clId="Web-{0DC18A87-C19B-1F38-5589-70012B675DB3}" dt="2026-05-04T19:46:19.303" v="8"/>
+          <ac:picMkLst>
+            <pc:docMk/>
+            <pc:sldMk cId="1065076301" sldId="302"/>
+            <ac:picMk id="8" creationId="{483E87FB-D474-8F86-DAA7-D79A2786BE7D}"/>
+          </ac:picMkLst>
+        </pc:picChg>
+        <pc:picChg chg="mod topLvl">
+          <ac:chgData name="Deborah Shaw" userId="S::deborah_shaw@wycliffeassociates.org::79bf7848-a030-4096-934a-3abbfde4984a" providerId="AD" clId="Web-{0DC18A87-C19B-1F38-5589-70012B675DB3}" dt="2026-05-04T19:46:32.600" v="10" actId="1076"/>
+          <ac:picMkLst>
+            <pc:docMk/>
+            <pc:sldMk cId="1065076301" sldId="302"/>
+            <ac:picMk id="9" creationId="{BA9113A0-4C20-0D99-5E50-E5503CAA2338}"/>
+          </ac:picMkLst>
+        </pc:picChg>
+        <pc:picChg chg="mod topLvl">
+          <ac:chgData name="Deborah Shaw" userId="S::deborah_shaw@wycliffeassociates.org::79bf7848-a030-4096-934a-3abbfde4984a" providerId="AD" clId="Web-{0DC18A87-C19B-1F38-5589-70012B675DB3}" dt="2026-05-04T19:46:27.178" v="9" actId="1076"/>
+          <ac:picMkLst>
+            <pc:docMk/>
+            <pc:sldMk cId="1065076301" sldId="302"/>
+            <ac:picMk id="10" creationId="{16BCE283-C8EC-1805-3002-EFBB0EE4EDB4}"/>
+          </ac:picMkLst>
+        </pc:picChg>
+      </pc:sldChg>
+    </pc:docChg>
+  </pc:docChgLst>
+  <pc:docChgLst>
+    <pc:chgData name="Deborah Shaw" userId="S::deborah_shaw@wycliffeassociates.org::79bf7848-a030-4096-934a-3abbfde4984a" providerId="AD" clId="Web-{68942F92-4A19-407F-496A-26C8396B9413}"/>
+    <pc:docChg chg="modSld">
+      <pc:chgData name="Deborah Shaw" userId="S::deborah_shaw@wycliffeassociates.org::79bf7848-a030-4096-934a-3abbfde4984a" providerId="AD" clId="Web-{68942F92-4A19-407F-496A-26C8396B9413}" dt="2026-05-04T19:59:15.580" v="34" actId="1076"/>
+      <pc:docMkLst>
+        <pc:docMk/>
+      </pc:docMkLst>
+      <pc:sldChg chg="modSp">
+        <pc:chgData name="Deborah Shaw" userId="S::deborah_shaw@wycliffeassociates.org::79bf7848-a030-4096-934a-3abbfde4984a" providerId="AD" clId="Web-{68942F92-4A19-407F-496A-26C8396B9413}" dt="2026-05-04T19:59:15.580" v="34" actId="1076"/>
+        <pc:sldMkLst>
+          <pc:docMk/>
+          <pc:sldMk cId="1065076301" sldId="302"/>
+        </pc:sldMkLst>
+        <pc:spChg chg="mod">
+          <ac:chgData name="Deborah Shaw" userId="S::deborah_shaw@wycliffeassociates.org::79bf7848-a030-4096-934a-3abbfde4984a" providerId="AD" clId="Web-{68942F92-4A19-407F-496A-26C8396B9413}" dt="2026-05-04T19:59:13.096" v="33" actId="1076"/>
+          <ac:spMkLst>
+            <pc:docMk/>
+            <pc:sldMk cId="1065076301" sldId="302"/>
+            <ac:spMk id="11" creationId="{24F49C6F-3DEE-94D4-E8F4-4CFD0F1F3254}"/>
+          </ac:spMkLst>
+        </pc:spChg>
+        <pc:spChg chg="mod">
+          <ac:chgData name="Deborah Shaw" userId="S::deborah_shaw@wycliffeassociates.org::79bf7848-a030-4096-934a-3abbfde4984a" providerId="AD" clId="Web-{68942F92-4A19-407F-496A-26C8396B9413}" dt="2026-05-04T19:59:15.580" v="34" actId="1076"/>
+          <ac:spMkLst>
+            <pc:docMk/>
+            <pc:sldMk cId="1065076301" sldId="302"/>
+            <ac:spMk id="12" creationId="{D415D071-5A0C-1B65-538A-D43349638B3F}"/>
+          </ac:spMkLst>
+        </pc:spChg>
+      </pc:sldChg>
+    </pc:docChg>
+  </pc:docChgLst>
+</pc:chgInfo>
+</file>
+
 <file path=ppt/notesMasters/notesMaster1.xml><?xml version="1.0" encoding="utf-8"?>
 <p:notesMaster xmlns:a="http://schemas.openxmlformats.org/drawingml/2006/main" xmlns:r="http://schemas.openxmlformats.org/officeDocument/2006/relationships" xmlns:p="http://schemas.openxmlformats.org/presentationml/2006/main">
   <p:cSld>
@@ -229,7 +427,7 @@
           <a:p>
             <a:fld id="{AC6AA070-92F4-A447-BB88-F5E94FF9CF8B}" type="datetimeFigureOut">
               <a:rPr lang="en-US" smtClean="0"/>
-              <a:t>10/23/25</a:t>
+              <a:t>5/4/2026</a:t>
             </a:fld>
             <a:endParaRPr lang="en-US"/>
           </a:p>
@@ -633,7 +831,7 @@
           <a:p>
             <a:fld id="{2D176C0A-5C67-429D-B78E-C0F7FE360763}" type="datetimeFigureOut">
               <a:rPr lang="en-US" smtClean="0"/>
-              <a:t>10/23/25</a:t>
+              <a:t>5/4/2026</a:t>
             </a:fld>
             <a:endParaRPr lang="en-US"/>
           </a:p>
@@ -2470,7 +2668,7 @@
           <a:p>
             <a:pPr algn="ctr"/>
             <a:r>
-              <a:rPr lang="en-US" sz="3600" b="1" dirty="0">
+              <a:rPr lang="en-US" sz="3600" b="1">
                 <a:solidFill>
                   <a:srgbClr val="B95659"/>
                 </a:solidFill>
@@ -4007,7 +4205,7 @@
           <a:p>
             <a:pPr algn="ctr"/>
             <a:r>
-              <a:rPr lang="en-US" sz="3600" b="1" dirty="0">
+              <a:rPr lang="en-US" sz="3600" b="1">
                 <a:solidFill>
                   <a:srgbClr val="B95659"/>
                 </a:solidFill>
@@ -4048,7 +4246,7 @@
           <a:lstStyle/>
           <a:p>
             <a:pPr algn="ctr"/>
-            <a:endParaRPr lang="en-US" sz="2000" dirty="0">
+            <a:endParaRPr lang="en-US" sz="2000">
               <a:solidFill>
                 <a:srgbClr val="716557"/>
               </a:solidFill>
@@ -4090,7 +4288,7 @@
           <a:p>
             <a:pPr algn="ctr"/>
             <a:r>
-              <a:rPr lang="en-US" sz="2000" b="1" dirty="0">
+              <a:rPr lang="en-US" sz="2000" b="1">
                 <a:solidFill>
                   <a:schemeClr val="bg1"/>
                 </a:solidFill>
@@ -4134,7 +4332,7 @@
           <a:p>
             <a:pPr algn="ctr"/>
             <a:r>
-              <a:rPr lang="en-US" sz="2000" b="1" dirty="0">
+              <a:rPr lang="en-US" sz="2000" b="1">
                 <a:solidFill>
                   <a:schemeClr val="bg1"/>
                 </a:solidFill>
@@ -4419,7 +4617,7 @@
           <a:lstStyle/>
           <a:p>
             <a:r>
-              <a:rPr lang="en-US" dirty="0"/>
+              <a:rPr lang="en-US"/>
               <a:t>People needed</a:t>
             </a:r>
           </a:p>
@@ -4440,13 +4638,13 @@
           <p:nvPr/>
         </p:nvPicPr>
         <p:blipFill>
-          <a:blip r:embed="rId2">
+          <a:blip>
             <a:extLst>
               <a:ext uri="{28A0092B-C50C-407E-A947-70E740481C1C}">
                 <a14:useLocalDpi xmlns:a14="http://schemas.microsoft.com/office/drawing/2010/main" val="0"/>
               </a:ext>
               <a:ext uri="{96DAC541-7B7A-43D3-8B79-37D633B846F1}">
-                <asvg:svgBlip xmlns:asvg="http://schemas.microsoft.com/office/drawing/2016/SVG/main" r:embed="rId3"/>
+                <asvg:svgBlip xmlns:asvg="http://schemas.microsoft.com/office/drawing/2016/SVG/main" r:embed="rId2"/>
               </a:ext>
             </a:extLst>
           </a:blip>
@@ -4498,7 +4696,7 @@
           <a:lstStyle/>
           <a:p>
             <a:pPr algn="ctr"/>
-            <a:endParaRPr lang="en-US" sz="2000" dirty="0">
+            <a:endParaRPr lang="en-US" sz="2000">
               <a:solidFill>
                 <a:srgbClr val="716557"/>
               </a:solidFill>
@@ -4523,13 +4721,13 @@
           <p:nvPr/>
         </p:nvPicPr>
         <p:blipFill>
-          <a:blip r:embed="rId4">
+          <a:blip>
             <a:extLst>
               <a:ext uri="{28A0092B-C50C-407E-A947-70E740481C1C}">
                 <a14:useLocalDpi xmlns:a14="http://schemas.microsoft.com/office/drawing/2010/main" val="0"/>
               </a:ext>
               <a:ext uri="{96DAC541-7B7A-43D3-8B79-37D633B846F1}">
-                <asvg:svgBlip xmlns:asvg="http://schemas.microsoft.com/office/drawing/2016/SVG/main" r:embed="rId5"/>
+                <asvg:svgBlip xmlns:asvg="http://schemas.microsoft.com/office/drawing/2016/SVG/main" r:embed="rId3"/>
               </a:ext>
             </a:extLst>
           </a:blip>
@@ -4576,7 +4774,7 @@
           <a:lstStyle/>
           <a:p>
             <a:r>
-              <a:rPr lang="en-US" b="1" dirty="0">
+              <a:rPr lang="en-US" b="1">
                 <a:solidFill>
                   <a:schemeClr val="accent1"/>
                 </a:solidFill>
@@ -4590,7 +4788,7 @@
               <a:buChar char="•"/>
             </a:pPr>
             <a:r>
-              <a:rPr lang="en-US" b="1" dirty="0">
+              <a:rPr lang="en-US" b="1">
                 <a:solidFill>
                   <a:schemeClr val="accent2"/>
                 </a:solidFill>
@@ -4604,7 +4802,7 @@
               <a:buChar char="•"/>
             </a:pPr>
             <a:r>
-              <a:rPr lang="en-US" b="1" dirty="0">
+              <a:rPr lang="en-US" b="1">
                 <a:solidFill>
                   <a:schemeClr val="accent2"/>
                 </a:solidFill>
@@ -4618,7 +4816,7 @@
               <a:buChar char="•"/>
             </a:pPr>
             <a:r>
-              <a:rPr lang="en-US" b="1" dirty="0">
+              <a:rPr lang="en-US" b="1">
                 <a:solidFill>
                   <a:schemeClr val="accent2"/>
                 </a:solidFill>
@@ -4632,7 +4830,7 @@
               <a:buChar char="•"/>
             </a:pPr>
             <a:r>
-              <a:rPr lang="en-US" b="1" dirty="0">
+              <a:rPr lang="en-US" b="1">
                 <a:solidFill>
                   <a:schemeClr val="accent2"/>
                 </a:solidFill>
@@ -4646,7 +4844,7 @@
               <a:buChar char="•"/>
             </a:pPr>
             <a:r>
-              <a:rPr lang="en-US" b="1" dirty="0">
+              <a:rPr lang="en-US" b="1">
                 <a:solidFill>
                   <a:schemeClr val="accent2"/>
                 </a:solidFill>
@@ -4660,7 +4858,7 @@
               <a:buChar char="•"/>
             </a:pPr>
             <a:r>
-              <a:rPr lang="en-US" b="1" dirty="0">
+              <a:rPr lang="en-US" b="1">
                 <a:solidFill>
                   <a:schemeClr val="accent2"/>
                 </a:solidFill>
@@ -4685,13 +4883,13 @@
           <p:nvPr/>
         </p:nvPicPr>
         <p:blipFill>
-          <a:blip r:embed="rId2">
+          <a:blip>
             <a:extLst>
               <a:ext uri="{28A0092B-C50C-407E-A947-70E740481C1C}">
                 <a14:useLocalDpi xmlns:a14="http://schemas.microsoft.com/office/drawing/2010/main" val="0"/>
               </a:ext>
               <a:ext uri="{96DAC541-7B7A-43D3-8B79-37D633B846F1}">
-                <asvg:svgBlip xmlns:asvg="http://schemas.microsoft.com/office/drawing/2016/SVG/main" r:embed="rId3"/>
+                <asvg:svgBlip xmlns:asvg="http://schemas.microsoft.com/office/drawing/2016/SVG/main" r:embed="rId2"/>
               </a:ext>
             </a:extLst>
           </a:blip>
@@ -4724,13 +4922,13 @@
           <p:nvPr/>
         </p:nvPicPr>
         <p:blipFill>
-          <a:blip r:embed="rId2">
+          <a:blip>
             <a:extLst>
               <a:ext uri="{28A0092B-C50C-407E-A947-70E740481C1C}">
                 <a14:useLocalDpi xmlns:a14="http://schemas.microsoft.com/office/drawing/2010/main" val="0"/>
               </a:ext>
               <a:ext uri="{96DAC541-7B7A-43D3-8B79-37D633B846F1}">
-                <asvg:svgBlip xmlns:asvg="http://schemas.microsoft.com/office/drawing/2016/SVG/main" r:embed="rId3"/>
+                <asvg:svgBlip xmlns:asvg="http://schemas.microsoft.com/office/drawing/2016/SVG/main" r:embed="rId2"/>
               </a:ext>
             </a:extLst>
           </a:blip>
@@ -4763,13 +4961,13 @@
           <p:nvPr/>
         </p:nvPicPr>
         <p:blipFill>
-          <a:blip r:embed="rId6">
+          <a:blip>
             <a:extLst>
               <a:ext uri="{28A0092B-C50C-407E-A947-70E740481C1C}">
                 <a14:useLocalDpi xmlns:a14="http://schemas.microsoft.com/office/drawing/2010/main" val="0"/>
               </a:ext>
               <a:ext uri="{96DAC541-7B7A-43D3-8B79-37D633B846F1}">
-                <asvg:svgBlip xmlns:asvg="http://schemas.microsoft.com/office/drawing/2016/SVG/main" r:embed="rId7"/>
+                <asvg:svgBlip xmlns:asvg="http://schemas.microsoft.com/office/drawing/2016/SVG/main" r:embed="rId4"/>
               </a:ext>
             </a:extLst>
           </a:blip>
@@ -4802,13 +5000,13 @@
           <p:nvPr/>
         </p:nvPicPr>
         <p:blipFill>
-          <a:blip r:embed="rId6">
+          <a:blip>
             <a:extLst>
               <a:ext uri="{28A0092B-C50C-407E-A947-70E740481C1C}">
                 <a14:useLocalDpi xmlns:a14="http://schemas.microsoft.com/office/drawing/2010/main" val="0"/>
               </a:ext>
               <a:ext uri="{96DAC541-7B7A-43D3-8B79-37D633B846F1}">
-                <asvg:svgBlip xmlns:asvg="http://schemas.microsoft.com/office/drawing/2016/SVG/main" r:embed="rId7"/>
+                <asvg:svgBlip xmlns:asvg="http://schemas.microsoft.com/office/drawing/2016/SVG/main" r:embed="rId4"/>
               </a:ext>
             </a:extLst>
           </a:blip>
@@ -4855,7 +5053,7 @@
           <a:lstStyle/>
           <a:p>
             <a:r>
-              <a:rPr lang="en-US" b="1" dirty="0">
+              <a:rPr lang="en-US" b="1">
                 <a:solidFill>
                   <a:schemeClr val="accent1"/>
                 </a:solidFill>
@@ -4869,7 +5067,7 @@
               <a:buChar char="•"/>
             </a:pPr>
             <a:r>
-              <a:rPr lang="en-US" b="1" dirty="0">
+              <a:rPr lang="en-US" b="1">
                 <a:solidFill>
                   <a:schemeClr val="accent2"/>
                 </a:solidFill>
@@ -4883,7 +5081,7 @@
               <a:buChar char="•"/>
             </a:pPr>
             <a:r>
-              <a:rPr lang="en-US" b="1" dirty="0">
+              <a:rPr lang="en-US" b="1">
                 <a:solidFill>
                   <a:schemeClr val="accent2"/>
                 </a:solidFill>
@@ -4897,7 +5095,7 @@
               <a:buChar char="•"/>
             </a:pPr>
             <a:r>
-              <a:rPr lang="en-US" b="1" dirty="0">
+              <a:rPr lang="en-US" b="1">
                 <a:solidFill>
                   <a:schemeClr val="accent2"/>
                 </a:solidFill>
@@ -4911,7 +5109,7 @@
               <a:buChar char="•"/>
             </a:pPr>
             <a:r>
-              <a:rPr lang="en-US" b="1" dirty="0">
+              <a:rPr lang="en-US" b="1">
                 <a:solidFill>
                   <a:schemeClr val="accent2"/>
                 </a:solidFill>
@@ -4936,10 +5134,10 @@
           <p:nvPr/>
         </p:nvPicPr>
         <p:blipFill>
-          <a:blip r:embed="rId8">
+          <a:blip>
             <a:extLst>
               <a:ext uri="{96DAC541-7B7A-43D3-8B79-37D633B846F1}">
-                <asvg:svgBlip xmlns:asvg="http://schemas.microsoft.com/office/drawing/2016/SVG/main" r:embed="rId9"/>
+                <asvg:svgBlip xmlns:asvg="http://schemas.microsoft.com/office/drawing/2016/SVG/main" r:embed="rId5"/>
               </a:ext>
             </a:extLst>
           </a:blip>
@@ -6069,10 +6267,10 @@
           <a:lstStyle/>
           <a:p>
             <a:br>
-              <a:rPr lang="en-US" dirty="0"/>
+              <a:rPr lang="en-US"/>
             </a:br>
             <a:r>
-              <a:rPr lang="en-US" dirty="0"/>
+              <a:rPr lang="en-US"/>
               <a:t>Prepare for Review</a:t>
             </a:r>
           </a:p>
@@ -6111,7 +6309,7 @@
               <a:buChar char="•"/>
             </a:pPr>
             <a:r>
-              <a:rPr lang="en-US" b="1" dirty="0">
+              <a:rPr lang="en-US" b="1">
                 <a:solidFill>
                   <a:srgbClr val="716557"/>
                 </a:solidFill>
@@ -6125,7 +6323,7 @@
               <a:buChar char="•"/>
             </a:pPr>
             <a:r>
-              <a:rPr lang="en-US" b="1" dirty="0">
+              <a:rPr lang="en-US" b="1">
                 <a:solidFill>
                   <a:srgbClr val="716557"/>
                 </a:solidFill>
@@ -6139,7 +6337,7 @@
               <a:buChar char="•"/>
             </a:pPr>
             <a:r>
-              <a:rPr lang="en-US" b="1" dirty="0">
+              <a:rPr lang="en-US" b="1">
                 <a:solidFill>
                   <a:srgbClr val="716557"/>
                 </a:solidFill>
@@ -6153,7 +6351,7 @@
               <a:buChar char="•"/>
             </a:pPr>
             <a:r>
-              <a:rPr lang="en-US" b="1" dirty="0">
+              <a:rPr lang="en-US" b="1">
                 <a:solidFill>
                   <a:srgbClr val="716557"/>
                 </a:solidFill>
@@ -6167,7 +6365,7 @@
               <a:buChar char="•"/>
             </a:pPr>
             <a:r>
-              <a:rPr lang="en-US" b="1" dirty="0">
+              <a:rPr lang="en-US" b="1">
                 <a:solidFill>
                   <a:srgbClr val="716557"/>
                 </a:solidFill>
@@ -6181,7 +6379,7 @@
               <a:buChar char="•"/>
             </a:pPr>
             <a:r>
-              <a:rPr lang="en-US" b="1" dirty="0">
+              <a:rPr lang="en-US" b="1">
                 <a:solidFill>
                   <a:srgbClr val="716557"/>
                 </a:solidFill>
@@ -6195,7 +6393,7 @@
               <a:buChar char="•"/>
             </a:pPr>
             <a:r>
-              <a:rPr lang="en-US" b="1" dirty="0">
+              <a:rPr lang="en-US" b="1">
                 <a:solidFill>
                   <a:srgbClr val="716557"/>
                 </a:solidFill>
@@ -6208,7 +6406,7 @@
               <a:buFont typeface="Arial" panose="020B0604020202020204" pitchFamily="34" charset="0"/>
               <a:buChar char="•"/>
             </a:pPr>
-            <a:endParaRPr lang="en-US" b="1" dirty="0">
+            <a:endParaRPr lang="en-US" b="1">
               <a:solidFill>
                 <a:srgbClr val="716557"/>
               </a:solidFill>
@@ -6267,13 +6465,13 @@
           <p:nvPr/>
         </p:nvPicPr>
         <p:blipFill>
-          <a:blip r:embed="rId3">
+          <a:blip>
             <a:extLst>
               <a:ext uri="{28A0092B-C50C-407E-A947-70E740481C1C}">
                 <a14:useLocalDpi xmlns:a14="http://schemas.microsoft.com/office/drawing/2010/main" val="0"/>
               </a:ext>
               <a:ext uri="{96DAC541-7B7A-43D3-8B79-37D633B846F1}">
-                <asvg:svgBlip xmlns:asvg="http://schemas.microsoft.com/office/drawing/2016/SVG/main" r:embed="rId4"/>
+                <asvg:svgBlip xmlns:asvg="http://schemas.microsoft.com/office/drawing/2016/SVG/main" r:embed="rId3"/>
               </a:ext>
             </a:extLst>
           </a:blip>
@@ -6306,13 +6504,13 @@
           <p:nvPr/>
         </p:nvPicPr>
         <p:blipFill>
-          <a:blip r:embed="rId5">
+          <a:blip>
             <a:extLst>
               <a:ext uri="{28A0092B-C50C-407E-A947-70E740481C1C}">
                 <a14:useLocalDpi xmlns:a14="http://schemas.microsoft.com/office/drawing/2010/main" val="0"/>
               </a:ext>
               <a:ext uri="{96DAC541-7B7A-43D3-8B79-37D633B846F1}">
-                <asvg:svgBlip xmlns:asvg="http://schemas.microsoft.com/office/drawing/2016/SVG/main" r:embed="rId6"/>
+                <asvg:svgBlip xmlns:asvg="http://schemas.microsoft.com/office/drawing/2016/SVG/main" r:embed="rId4"/>
               </a:ext>
             </a:extLst>
           </a:blip>
@@ -7068,53 +7266,53 @@
           <a:lstStyle/>
           <a:p>
             <a:r>
-              <a:rPr lang="en-US" sz="2400" b="1" dirty="0"/>
+              <a:rPr lang="en-US" sz="2400" b="1"/>
               <a:t>Matthew 3:13-17</a:t>
             </a:r>
-            <a:endParaRPr lang="en-US" sz="2400" dirty="0"/>
+            <a:endParaRPr lang="en-US" sz="2400"/>
           </a:p>
           <a:p>
-            <a:endParaRPr lang="en-US" sz="2400" b="1" dirty="0"/>
+            <a:endParaRPr lang="en-US" sz="2400" b="1"/>
           </a:p>
           <a:p>
             <a:r>
-              <a:rPr lang="en-US" sz="1600" b="1" dirty="0"/>
+              <a:rPr lang="en-US" sz="1600" b="1"/>
               <a:t>Background: </a:t>
             </a:r>
             <a:r>
-              <a:rPr lang="en-US" sz="1600" dirty="0"/>
+              <a:rPr lang="en-US" sz="1600"/>
               <a:t>After Jesus grew up, John the Baptist went into the wilderness and preached that people should stop sinning and be baptized. John also taught that someone more powerful than he would come, and that person would judge people.</a:t>
             </a:r>
           </a:p>
           <a:p>
-            <a:endParaRPr lang="en-US" sz="1600" b="1" dirty="0"/>
+            <a:endParaRPr lang="en-US" sz="1600" b="1"/>
           </a:p>
           <a:p>
             <a:r>
-              <a:rPr lang="en-US" sz="1600" b="1" dirty="0"/>
+              <a:rPr lang="en-US" sz="1600" b="1"/>
               <a:t>Read the passage.</a:t>
             </a:r>
           </a:p>
           <a:p>
-            <a:endParaRPr lang="en-US" sz="1600" b="1" dirty="0"/>
+            <a:endParaRPr lang="en-US" sz="1600" b="1"/>
           </a:p>
           <a:p>
             <a:r>
-              <a:rPr lang="en-US" sz="1600" b="1" dirty="0"/>
+              <a:rPr lang="en-US" sz="1600" b="1"/>
               <a:t>Part 1</a:t>
             </a:r>
           </a:p>
           <a:p>
-            <a:endParaRPr lang="en-US" sz="1600" b="1" dirty="0"/>
+            <a:endParaRPr lang="en-US" sz="1600" b="1"/>
           </a:p>
           <a:p>
             <a:r>
-              <a:rPr lang="en-US" sz="1600" dirty="0"/>
+              <a:rPr lang="en-US" sz="1600"/>
               <a:t>Tell in your own words what you just read in the passage.</a:t>
             </a:r>
           </a:p>
           <a:p>
-            <a:endParaRPr lang="en-US" sz="1600" dirty="0"/>
+            <a:endParaRPr lang="en-US" sz="1600"/>
           </a:p>
           <a:p>
             <a:pPr marL="285750" indent="-285750">
@@ -7125,7 +7323,7 @@
               <a:buChar char="q"/>
             </a:pPr>
             <a:r>
-              <a:rPr lang="en-US" sz="1600" dirty="0"/>
+              <a:rPr lang="en-US" sz="1600"/>
               <a:t>Jesus came to the Jordan River to be baptized by John. [3:13]</a:t>
             </a:r>
           </a:p>
@@ -7138,7 +7336,7 @@
               <a:buChar char="q"/>
             </a:pPr>
             <a:r>
-              <a:rPr lang="en-US" sz="1600" dirty="0"/>
+              <a:rPr lang="en-US" sz="1600"/>
               <a:t>John tried to stop Jesus, but Jesus said that it was right for John to baptize him. [3:14-15]</a:t>
             </a:r>
           </a:p>
@@ -7151,7 +7349,7 @@
               <a:buChar char="q"/>
             </a:pPr>
             <a:r>
-              <a:rPr lang="en-US" sz="1600" dirty="0"/>
+              <a:rPr lang="en-US" sz="1600"/>
               <a:t>After John baptized Jesus, God’s Spirit came down like a dove and rested on Jesus. [3:16]</a:t>
             </a:r>
           </a:p>
@@ -7164,7 +7362,7 @@
               <a:buChar char="q"/>
             </a:pPr>
             <a:r>
-              <a:rPr lang="en-US" sz="1600" dirty="0"/>
+              <a:rPr lang="en-US" sz="1600"/>
               <a:t>A voice from heaven said, “This is my beloved Son. I am very pleased with him.” [3:17]</a:t>
             </a:r>
           </a:p>
@@ -7173,7 +7371,7 @@
               <a:buFont typeface="Wingdings" pitchFamily="2" charset="2"/>
               <a:buChar char="q"/>
             </a:pPr>
-            <a:endParaRPr lang="en-US" sz="1600" dirty="0"/>
+            <a:endParaRPr lang="en-US" sz="1600"/>
           </a:p>
         </p:txBody>
       </p:sp>
@@ -7536,7 +7734,7 @@
           <a:lstStyle/>
           <a:p>
             <a:pPr algn="ctr"/>
-            <a:endParaRPr lang="en-US" sz="2000" dirty="0">
+            <a:endParaRPr lang="en-US" sz="2000">
               <a:solidFill>
                 <a:srgbClr val="716557"/>
               </a:solidFill>
@@ -7577,25 +7775,25 @@
           <a:lstStyle/>
           <a:p>
             <a:r>
-              <a:rPr lang="en-US" sz="2400" b="1" dirty="0"/>
+              <a:rPr lang="en-US" sz="2400" b="1"/>
               <a:t>Part 2</a:t>
             </a:r>
           </a:p>
           <a:p>
             <a:r>
-              <a:rPr lang="en-US" sz="1600" dirty="0"/>
+              <a:rPr lang="en-US" sz="1600"/>
               <a:t>Answer the following questions from the specified verses:</a:t>
             </a:r>
           </a:p>
           <a:p>
-            <a:endParaRPr lang="en-US" sz="1600" dirty="0"/>
+            <a:endParaRPr lang="en-US" sz="1600"/>
           </a:p>
           <a:p>
             <a:pPr marL="342900" indent="-342900">
               <a:buAutoNum type="arabicPeriod"/>
             </a:pPr>
             <a:r>
-              <a:rPr lang="en-US" sz="1600" dirty="0"/>
+              <a:rPr lang="en-US" sz="1600"/>
               <a:t>[3:14] When Jesus came to be baptized, what did John tell Jesus?</a:t>
             </a:r>
           </a:p>
@@ -7603,23 +7801,23 @@
             <a:pPr marL="342900" indent="-342900">
               <a:buAutoNum type="arabicPeriod"/>
             </a:pPr>
-            <a:endParaRPr lang="en-US" sz="1600" dirty="0"/>
+            <a:endParaRPr lang="en-US" sz="1600"/>
           </a:p>
           <a:p>
             <a:r>
-              <a:rPr lang="en-US" sz="1600" dirty="0"/>
+              <a:rPr lang="en-US" sz="1600"/>
               <a:t>	John told Jesus that he needed to be baptized by Jesus.</a:t>
             </a:r>
           </a:p>
           <a:p>
-            <a:endParaRPr lang="en-US" sz="1600" dirty="0"/>
+            <a:endParaRPr lang="en-US" sz="1600"/>
           </a:p>
           <a:p>
             <a:pPr marL="342900" indent="-342900">
               <a:buAutoNum type="arabicPeriod" startAt="2"/>
             </a:pPr>
             <a:r>
-              <a:rPr lang="en-US" sz="1600" dirty="0"/>
+              <a:rPr lang="en-US" sz="1600"/>
               <a:t>[3:15] What did Jesus say was the reason that John should baptize him?</a:t>
             </a:r>
           </a:p>
@@ -7627,23 +7825,23 @@
             <a:pPr marL="342900" indent="-342900">
               <a:buAutoNum type="arabicPeriod" startAt="2"/>
             </a:pPr>
-            <a:endParaRPr lang="en-US" sz="1600" dirty="0"/>
+            <a:endParaRPr lang="en-US" sz="1600"/>
           </a:p>
           <a:p>
             <a:r>
-              <a:rPr lang="en-US" sz="1600" dirty="0"/>
+              <a:rPr lang="en-US" sz="1600"/>
               <a:t>	It was right for them to fulfill all righteousness.</a:t>
             </a:r>
           </a:p>
           <a:p>
-            <a:endParaRPr lang="en-US" sz="1600" dirty="0"/>
+            <a:endParaRPr lang="en-US" sz="1600"/>
           </a:p>
           <a:p>
             <a:pPr marL="342900" indent="-342900">
               <a:buAutoNum type="arabicPeriod" startAt="3"/>
             </a:pPr>
             <a:r>
-              <a:rPr lang="en-US" sz="1600" dirty="0"/>
+              <a:rPr lang="en-US" sz="1600"/>
               <a:t>[3:16] What did the Spirit of God do when Jesus came out of the water?</a:t>
             </a:r>
           </a:p>
@@ -7651,23 +7849,23 @@
             <a:pPr marL="342900" indent="-342900">
               <a:buAutoNum type="arabicPeriod" startAt="3"/>
             </a:pPr>
-            <a:endParaRPr lang="en-US" sz="1600" dirty="0"/>
+            <a:endParaRPr lang="en-US" sz="1600"/>
           </a:p>
           <a:p>
             <a:r>
-              <a:rPr lang="en-US" sz="1600" dirty="0"/>
+              <a:rPr lang="en-US" sz="1600"/>
               <a:t>	The Spirit of God came down and rested on Jesus.</a:t>
             </a:r>
           </a:p>
           <a:p>
-            <a:endParaRPr lang="en-US" sz="1600" dirty="0"/>
+            <a:endParaRPr lang="en-US" sz="1600"/>
           </a:p>
           <a:p>
             <a:pPr marL="342900" indent="-342900">
               <a:buAutoNum type="arabicPeriod" startAt="4"/>
             </a:pPr>
             <a:r>
-              <a:rPr lang="en-US" sz="1600" dirty="0"/>
+              <a:rPr lang="en-US" sz="1600"/>
               <a:t>[3:17] What did the voice from heaven say after Jesus came out of the water?</a:t>
             </a:r>
           </a:p>
@@ -7675,39 +7873,39 @@
             <a:pPr marL="342900" indent="-342900">
               <a:buAutoNum type="arabicPeriod" startAt="4"/>
             </a:pPr>
-            <a:endParaRPr lang="en-US" sz="1600" dirty="0"/>
+            <a:endParaRPr lang="en-US" sz="1600"/>
           </a:p>
           <a:p>
             <a:r>
-              <a:rPr lang="en-US" sz="1600" dirty="0"/>
+              <a:rPr lang="en-US" sz="1600"/>
               <a:t>	The voice said, “This is my beloved Son. I am very pleased with him.”</a:t>
             </a:r>
           </a:p>
           <a:p>
-            <a:endParaRPr lang="en-US" sz="1600" dirty="0"/>
+            <a:endParaRPr lang="en-US" sz="1600"/>
           </a:p>
           <a:p>
             <a:pPr marL="342900" indent="-342900">
               <a:buAutoNum type="arabicPeriod" startAt="5"/>
             </a:pPr>
             <a:r>
-              <a:rPr lang="en-US" sz="1600" dirty="0"/>
+              <a:rPr lang="en-US" sz="1600"/>
               <a:t>[3:17] Whose voice do you think was speaking?</a:t>
             </a:r>
           </a:p>
           <a:p>
-            <a:endParaRPr lang="en-US" sz="1600" dirty="0"/>
+            <a:endParaRPr lang="en-US" sz="1600"/>
           </a:p>
           <a:p>
             <a:r>
-              <a:rPr lang="en-US" sz="1600" dirty="0"/>
+              <a:rPr lang="en-US" sz="1600"/>
               <a:t>	By saying the voice came out of heaven, the passage shows that it was the voice of </a:t>
             </a:r>
             <a:br>
-              <a:rPr lang="en-US" sz="1600" dirty="0"/>
+              <a:rPr lang="en-US" sz="1600"/>
             </a:br>
             <a:r>
-              <a:rPr lang="en-US" sz="1600" dirty="0"/>
+              <a:rPr lang="en-US" sz="1600"/>
               <a:t>	God the Father.</a:t>
             </a:r>
           </a:p>
@@ -8344,7 +8542,12 @@
             <p:ph type="title"/>
           </p:nvPr>
         </p:nvSpPr>
-        <p:spPr/>
+        <p:spPr>
+          <a:xfrm>
+            <a:off x="628650" y="386512"/>
+            <a:ext cx="7886700" cy="604473"/>
+          </a:xfrm>
+        </p:spPr>
         <p:txBody>
           <a:bodyPr/>
           <a:lstStyle/>
@@ -8356,240 +8559,6 @@
           </a:p>
         </p:txBody>
       </p:sp>
-      <p:pic>
-        <p:nvPicPr>
-          <p:cNvPr id="3" name="Graphic 2" descr="User with solid fill">
-            <a:extLst>
-              <a:ext uri="{FF2B5EF4-FFF2-40B4-BE49-F238E27FC236}">
-                <a16:creationId xmlns:a16="http://schemas.microsoft.com/office/drawing/2014/main" id="{A91FA892-B944-7626-F197-81825DFD5ECC}"/>
-              </a:ext>
-            </a:extLst>
-          </p:cNvPr>
-          <p:cNvPicPr>
-            <a:picLocks noChangeAspect="1"/>
-          </p:cNvPicPr>
-          <p:nvPr/>
-        </p:nvPicPr>
-        <p:blipFill>
-          <a:blip r:embed="rId2">
-            <a:extLst>
-              <a:ext uri="{28A0092B-C50C-407E-A947-70E740481C1C}">
-                <a14:useLocalDpi xmlns:a14="http://schemas.microsoft.com/office/drawing/2010/main" val="0"/>
-              </a:ext>
-              <a:ext uri="{96DAC541-7B7A-43D3-8B79-37D633B846F1}">
-                <asvg:svgBlip xmlns:asvg="http://schemas.microsoft.com/office/drawing/2016/SVG/main" r:embed="rId3"/>
-              </a:ext>
-            </a:extLst>
-          </a:blip>
-          <a:stretch>
-            <a:fillRect/>
-          </a:stretch>
-        </p:blipFill>
-        <p:spPr>
-          <a:xfrm>
-            <a:off x="489664" y="1485552"/>
-            <a:ext cx="1072109" cy="1072109"/>
-          </a:xfrm>
-          <a:prstGeom prst="rect">
-            <a:avLst/>
-          </a:prstGeom>
-        </p:spPr>
-      </p:pic>
-      <p:pic>
-        <p:nvPicPr>
-          <p:cNvPr id="5" name="Graphic 4" descr="Clipboard outline">
-            <a:extLst>
-              <a:ext uri="{FF2B5EF4-FFF2-40B4-BE49-F238E27FC236}">
-                <a16:creationId xmlns:a16="http://schemas.microsoft.com/office/drawing/2014/main" id="{A00E2EC9-E7FE-8261-3154-3E440E5600AF}"/>
-              </a:ext>
-            </a:extLst>
-          </p:cNvPr>
-          <p:cNvPicPr>
-            <a:picLocks noChangeAspect="1"/>
-          </p:cNvPicPr>
-          <p:nvPr/>
-        </p:nvPicPr>
-        <p:blipFill>
-          <a:blip r:embed="rId4">
-            <a:extLst>
-              <a:ext uri="{28A0092B-C50C-407E-A947-70E740481C1C}">
-                <a14:useLocalDpi xmlns:a14="http://schemas.microsoft.com/office/drawing/2010/main" val="0"/>
-              </a:ext>
-              <a:ext uri="{96DAC541-7B7A-43D3-8B79-37D633B846F1}">
-                <asvg:svgBlip xmlns:asvg="http://schemas.microsoft.com/office/drawing/2016/SVG/main" r:embed="rId5"/>
-              </a:ext>
-            </a:extLst>
-          </a:blip>
-          <a:stretch>
-            <a:fillRect/>
-          </a:stretch>
-        </p:blipFill>
-        <p:spPr>
-          <a:xfrm>
-            <a:off x="1366168" y="1661203"/>
-            <a:ext cx="457200" cy="457200"/>
-          </a:xfrm>
-          <a:prstGeom prst="rect">
-            <a:avLst/>
-          </a:prstGeom>
-        </p:spPr>
-      </p:pic>
-      <p:pic>
-        <p:nvPicPr>
-          <p:cNvPr id="7" name="Graphic 6" descr="User with solid fill">
-            <a:extLst>
-              <a:ext uri="{FF2B5EF4-FFF2-40B4-BE49-F238E27FC236}">
-                <a16:creationId xmlns:a16="http://schemas.microsoft.com/office/drawing/2014/main" id="{78EE56C4-9B8D-E190-FFFE-EB268FE0A7E0}"/>
-              </a:ext>
-            </a:extLst>
-          </p:cNvPr>
-          <p:cNvPicPr>
-            <a:picLocks noChangeAspect="1"/>
-          </p:cNvPicPr>
-          <p:nvPr/>
-        </p:nvPicPr>
-        <p:blipFill>
-          <a:blip r:embed="rId2">
-            <a:extLst>
-              <a:ext uri="{28A0092B-C50C-407E-A947-70E740481C1C}">
-                <a14:useLocalDpi xmlns:a14="http://schemas.microsoft.com/office/drawing/2010/main" val="0"/>
-              </a:ext>
-              <a:ext uri="{96DAC541-7B7A-43D3-8B79-37D633B846F1}">
-                <asvg:svgBlip xmlns:asvg="http://schemas.microsoft.com/office/drawing/2016/SVG/main" r:embed="rId3"/>
-              </a:ext>
-            </a:extLst>
-          </a:blip>
-          <a:stretch>
-            <a:fillRect/>
-          </a:stretch>
-        </p:blipFill>
-        <p:spPr>
-          <a:xfrm>
-            <a:off x="6423603" y="3982478"/>
-            <a:ext cx="1182489" cy="1182489"/>
-          </a:xfrm>
-          <a:prstGeom prst="rect">
-            <a:avLst/>
-          </a:prstGeom>
-        </p:spPr>
-      </p:pic>
-      <p:pic>
-        <p:nvPicPr>
-          <p:cNvPr id="8" name="Graphic 7" descr="User with solid fill">
-            <a:extLst>
-              <a:ext uri="{FF2B5EF4-FFF2-40B4-BE49-F238E27FC236}">
-                <a16:creationId xmlns:a16="http://schemas.microsoft.com/office/drawing/2014/main" id="{483E87FB-D474-8F86-DAA7-D79A2786BE7D}"/>
-              </a:ext>
-            </a:extLst>
-          </p:cNvPr>
-          <p:cNvPicPr>
-            <a:picLocks noChangeAspect="1"/>
-          </p:cNvPicPr>
-          <p:nvPr/>
-        </p:nvPicPr>
-        <p:blipFill>
-          <a:blip r:embed="rId2">
-            <a:extLst>
-              <a:ext uri="{28A0092B-C50C-407E-A947-70E740481C1C}">
-                <a14:useLocalDpi xmlns:a14="http://schemas.microsoft.com/office/drawing/2010/main" val="0"/>
-              </a:ext>
-              <a:ext uri="{96DAC541-7B7A-43D3-8B79-37D633B846F1}">
-                <asvg:svgBlip xmlns:asvg="http://schemas.microsoft.com/office/drawing/2016/SVG/main" r:embed="rId3"/>
-              </a:ext>
-            </a:extLst>
-          </a:blip>
-          <a:stretch>
-            <a:fillRect/>
-          </a:stretch>
-        </p:blipFill>
-        <p:spPr>
-          <a:xfrm>
-            <a:off x="7420160" y="3930970"/>
-            <a:ext cx="1182489" cy="1182489"/>
-          </a:xfrm>
-          <a:prstGeom prst="rect">
-            <a:avLst/>
-          </a:prstGeom>
-        </p:spPr>
-      </p:pic>
-      <p:pic>
-        <p:nvPicPr>
-          <p:cNvPr id="9" name="Graphic 8" descr="User with solid fill">
-            <a:extLst>
-              <a:ext uri="{FF2B5EF4-FFF2-40B4-BE49-F238E27FC236}">
-                <a16:creationId xmlns:a16="http://schemas.microsoft.com/office/drawing/2014/main" id="{BA9113A0-4C20-0D99-5E50-E5503CAA2338}"/>
-              </a:ext>
-            </a:extLst>
-          </p:cNvPr>
-          <p:cNvPicPr>
-            <a:picLocks noChangeAspect="1"/>
-          </p:cNvPicPr>
-          <p:nvPr/>
-        </p:nvPicPr>
-        <p:blipFill>
-          <a:blip r:embed="rId6">
-            <a:extLst>
-              <a:ext uri="{28A0092B-C50C-407E-A947-70E740481C1C}">
-                <a14:useLocalDpi xmlns:a14="http://schemas.microsoft.com/office/drawing/2010/main" val="0"/>
-              </a:ext>
-              <a:ext uri="{96DAC541-7B7A-43D3-8B79-37D633B846F1}">
-                <asvg:svgBlip xmlns:asvg="http://schemas.microsoft.com/office/drawing/2016/SVG/main" r:embed="rId7"/>
-              </a:ext>
-            </a:extLst>
-          </a:blip>
-          <a:stretch>
-            <a:fillRect/>
-          </a:stretch>
-        </p:blipFill>
-        <p:spPr>
-          <a:xfrm>
-            <a:off x="7420160" y="5349105"/>
-            <a:ext cx="1182489" cy="1182489"/>
-          </a:xfrm>
-          <a:prstGeom prst="rect">
-            <a:avLst/>
-          </a:prstGeom>
-        </p:spPr>
-      </p:pic>
-      <p:pic>
-        <p:nvPicPr>
-          <p:cNvPr id="10" name="Graphic 9" descr="User with solid fill">
-            <a:extLst>
-              <a:ext uri="{FF2B5EF4-FFF2-40B4-BE49-F238E27FC236}">
-                <a16:creationId xmlns:a16="http://schemas.microsoft.com/office/drawing/2014/main" id="{16BCE283-C8EC-1805-3002-EFBB0EE4EDB4}"/>
-              </a:ext>
-            </a:extLst>
-          </p:cNvPr>
-          <p:cNvPicPr>
-            <a:picLocks noChangeAspect="1"/>
-          </p:cNvPicPr>
-          <p:nvPr/>
-        </p:nvPicPr>
-        <p:blipFill>
-          <a:blip r:embed="rId6">
-            <a:extLst>
-              <a:ext uri="{28A0092B-C50C-407E-A947-70E740481C1C}">
-                <a14:useLocalDpi xmlns:a14="http://schemas.microsoft.com/office/drawing/2010/main" val="0"/>
-              </a:ext>
-              <a:ext uri="{96DAC541-7B7A-43D3-8B79-37D633B846F1}">
-                <asvg:svgBlip xmlns:asvg="http://schemas.microsoft.com/office/drawing/2016/SVG/main" r:embed="rId7"/>
-              </a:ext>
-            </a:extLst>
-          </a:blip>
-          <a:stretch>
-            <a:fillRect/>
-          </a:stretch>
-        </p:blipFill>
-        <p:spPr>
-          <a:xfrm>
-            <a:off x="6423602" y="5364198"/>
-            <a:ext cx="1182489" cy="1182489"/>
-          </a:xfrm>
-          <a:prstGeom prst="rect">
-            <a:avLst/>
-          </a:prstGeom>
-        </p:spPr>
-      </p:pic>
       <p:sp>
         <p:nvSpPr>
           <p:cNvPr id="11" name="TextBox 10">
@@ -8604,8 +8573,8 @@
         </p:nvSpPr>
         <p:spPr>
           <a:xfrm>
-            <a:off x="2182157" y="1291266"/>
-            <a:ext cx="5810002" cy="2462213"/>
+            <a:off x="214876" y="3260139"/>
+            <a:ext cx="4216014" cy="3016210"/>
           </a:xfrm>
           <a:prstGeom prst="rect">
             <a:avLst/>
@@ -8618,7 +8587,7 @@
           </a:ln>
         </p:spPr>
         <p:txBody>
-          <a:bodyPr wrap="square" rtlCol="0">
+          <a:bodyPr wrap="square" lIns="91440" tIns="45720" rIns="91440" bIns="45720" rtlCol="0" anchor="t">
             <a:spAutoFit/>
           </a:bodyPr>
           <a:lstStyle/>
@@ -8679,14 +8648,21 @@
             </a:r>
           </a:p>
           <a:p>
+            <a:pPr marL="1085850" indent="-171450"/>
             <a:r>
               <a:rPr lang="en-US" b="1" dirty="0">
                 <a:solidFill>
                   <a:srgbClr val="83A83F"/>
                 </a:solidFill>
               </a:rPr>
-              <a:t>		Mark the box for each complete answer</a:t>
+              <a:t>Mark the box for each complete answer</a:t>
             </a:r>
+            <a:endParaRPr lang="en-US" b="1" dirty="0">
+              <a:solidFill>
+                <a:srgbClr val="83A83F"/>
+              </a:solidFill>
+              <a:cs typeface="Arial"/>
+            </a:endParaRPr>
           </a:p>
           <a:p>
             <a:pPr marL="285750" indent="-285750">
@@ -8718,6 +8694,14 @@
           </a:p>
           <a:p>
             <a:pPr lvl="2"/>
+            <a:endParaRPr lang="en-US" b="1" dirty="0">
+              <a:solidFill>
+                <a:srgbClr val="83A83F"/>
+              </a:solidFill>
+            </a:endParaRPr>
+          </a:p>
+          <a:p>
+            <a:pPr lvl="2"/>
             <a:r>
               <a:rPr lang="en-US" b="1" dirty="0">
                 <a:solidFill>
@@ -8726,6 +8710,7 @@
               </a:rPr>
               <a:t>Make notes on any issues</a:t>
             </a:r>
+            <a:endParaRPr lang="en-US" dirty="0"/>
           </a:p>
         </p:txBody>
       </p:sp>
@@ -8743,8 +8728,8 @@
         </p:nvSpPr>
         <p:spPr>
           <a:xfrm>
-            <a:off x="514924" y="4522215"/>
-            <a:ext cx="5666744" cy="1908215"/>
+            <a:off x="4713110" y="3260139"/>
+            <a:ext cx="4216014" cy="3016210"/>
           </a:xfrm>
           <a:prstGeom prst="rect">
             <a:avLst/>
@@ -8757,10 +8742,21 @@
           </a:ln>
         </p:spPr>
         <p:txBody>
-          <a:bodyPr wrap="square" rtlCol="0">
+          <a:bodyPr wrap="square" lIns="91440" tIns="45720" rIns="91440" bIns="45720" rtlCol="0" anchor="t">
             <a:spAutoFit/>
           </a:bodyPr>
           <a:lstStyle/>
+          <a:p>
+            <a:pPr marL="285750" indent="-285750">
+              <a:buFont typeface="Arial" panose="020B0604020202020204" pitchFamily="34" charset="0"/>
+              <a:buChar char="•"/>
+            </a:pPr>
+            <a:endParaRPr lang="en-US" b="1" dirty="0">
+              <a:solidFill>
+                <a:srgbClr val="B95659"/>
+              </a:solidFill>
+            </a:endParaRPr>
+          </a:p>
           <a:p>
             <a:pPr marL="285750" indent="-285750">
               <a:buFont typeface="Arial" panose="020B0604020202020204" pitchFamily="34" charset="0"/>
@@ -8774,6 +8770,9 @@
               </a:rPr>
               <a:t>Listen/read along</a:t>
             </a:r>
+            <a:endParaRPr lang="en-US" dirty="0">
+              <a:cs typeface="Arial"/>
+            </a:endParaRPr>
           </a:p>
           <a:p>
             <a:pPr marL="285750" indent="-285750">
@@ -8800,8 +8799,21 @@
                   <a:srgbClr val="B95659"/>
                 </a:solidFill>
               </a:rPr>
-              <a:t>	Share summary of passage </a:t>
+              <a:t>	Share summary of passage</a:t>
             </a:r>
+          </a:p>
+          <a:p>
+            <a:pPr lvl="1"/>
+            <a:endParaRPr lang="en-US" dirty="0"/>
+          </a:p>
+          <a:p>
+            <a:pPr lvl="1"/>
+            <a:endParaRPr lang="en-US" dirty="0">
+              <a:solidFill>
+                <a:srgbClr val="000000"/>
+              </a:solidFill>
+              <a:cs typeface="Arial"/>
+            </a:endParaRPr>
           </a:p>
           <a:p>
             <a:pPr marL="285750" indent="-285750">
@@ -8842,87 +8854,371 @@
               <a:t>Answer questions </a:t>
             </a:r>
           </a:p>
+          <a:p>
+            <a:pPr lvl="2"/>
+            <a:endParaRPr lang="en-US" b="1" dirty="0">
+              <a:solidFill>
+                <a:srgbClr val="B95659"/>
+              </a:solidFill>
+            </a:endParaRPr>
+          </a:p>
         </p:txBody>
       </p:sp>
-      <p:sp>
-        <p:nvSpPr>
-          <p:cNvPr id="4" name="TextBox 3">
+      <p:grpSp>
+        <p:nvGrpSpPr>
+          <p:cNvPr id="14" name="Group 13">
             <a:extLst>
               <a:ext uri="{FF2B5EF4-FFF2-40B4-BE49-F238E27FC236}">
-                <a16:creationId xmlns:a16="http://schemas.microsoft.com/office/drawing/2014/main" id="{7622EE4B-DA9E-9816-3774-D28A2E6076C2}"/>
+                <a16:creationId xmlns:a16="http://schemas.microsoft.com/office/drawing/2014/main" id="{39528F37-A9FE-7A9A-26EA-D357E97F9902}"/>
               </a:ext>
             </a:extLst>
           </p:cNvPr>
-          <p:cNvSpPr txBox="1"/>
+          <p:cNvGrpSpPr/>
           <p:nvPr/>
-        </p:nvSpPr>
-        <p:spPr>
+        </p:nvGrpSpPr>
+        <p:grpSpPr>
           <a:xfrm>
-            <a:off x="538663" y="2557661"/>
-            <a:ext cx="1072109" cy="369332"/>
+            <a:off x="993842" y="1296052"/>
+            <a:ext cx="1333704" cy="1441441"/>
+            <a:chOff x="489664" y="1485552"/>
+            <a:chExt cx="1333704" cy="1441441"/>
           </a:xfrm>
-          <a:prstGeom prst="rect">
-            <a:avLst/>
-          </a:prstGeom>
-          <a:noFill/>
-        </p:spPr>
-        <p:txBody>
-          <a:bodyPr wrap="square" rtlCol="0">
-            <a:spAutoFit/>
-          </a:bodyPr>
-          <a:lstStyle/>
-          <a:p>
-            <a:r>
-              <a:rPr lang="en-US" b="1" dirty="0">
-                <a:solidFill>
-                  <a:schemeClr val="accent2"/>
-                </a:solidFill>
-              </a:rPr>
-              <a:t>Leader</a:t>
-            </a:r>
-          </a:p>
-        </p:txBody>
-      </p:sp>
-      <p:sp>
-        <p:nvSpPr>
-          <p:cNvPr id="6" name="TextBox 5">
+        </p:grpSpPr>
+        <p:pic>
+          <p:nvPicPr>
+            <p:cNvPr id="3" name="Graphic 2" descr="User with solid fill">
+              <a:extLst>
+                <a:ext uri="{FF2B5EF4-FFF2-40B4-BE49-F238E27FC236}">
+                  <a16:creationId xmlns:a16="http://schemas.microsoft.com/office/drawing/2014/main" id="{A91FA892-B944-7626-F197-81825DFD5ECC}"/>
+                </a:ext>
+              </a:extLst>
+            </p:cNvPr>
+            <p:cNvPicPr>
+              <a:picLocks noChangeAspect="1"/>
+            </p:cNvPicPr>
+            <p:nvPr/>
+          </p:nvPicPr>
+          <p:blipFill>
+            <a:blip>
+              <a:extLst>
+                <a:ext uri="{28A0092B-C50C-407E-A947-70E740481C1C}">
+                  <a14:useLocalDpi xmlns:a14="http://schemas.microsoft.com/office/drawing/2010/main" val="0"/>
+                </a:ext>
+                <a:ext uri="{96DAC541-7B7A-43D3-8B79-37D633B846F1}">
+                  <asvg:svgBlip xmlns:asvg="http://schemas.microsoft.com/office/drawing/2016/SVG/main" r:embed="rId2"/>
+                </a:ext>
+              </a:extLst>
+            </a:blip>
+            <a:stretch>
+              <a:fillRect/>
+            </a:stretch>
+          </p:blipFill>
+          <p:spPr>
+            <a:xfrm>
+              <a:off x="489664" y="1485552"/>
+              <a:ext cx="1072109" cy="1072109"/>
+            </a:xfrm>
+            <a:prstGeom prst="rect">
+              <a:avLst/>
+            </a:prstGeom>
+          </p:spPr>
+        </p:pic>
+        <p:pic>
+          <p:nvPicPr>
+            <p:cNvPr id="5" name="Graphic 4" descr="Clipboard outline">
+              <a:extLst>
+                <a:ext uri="{FF2B5EF4-FFF2-40B4-BE49-F238E27FC236}">
+                  <a16:creationId xmlns:a16="http://schemas.microsoft.com/office/drawing/2014/main" id="{A00E2EC9-E7FE-8261-3154-3E440E5600AF}"/>
+                </a:ext>
+              </a:extLst>
+            </p:cNvPr>
+            <p:cNvPicPr>
+              <a:picLocks noChangeAspect="1"/>
+            </p:cNvPicPr>
+            <p:nvPr/>
+          </p:nvPicPr>
+          <p:blipFill>
+            <a:blip>
+              <a:extLst>
+                <a:ext uri="{28A0092B-C50C-407E-A947-70E740481C1C}">
+                  <a14:useLocalDpi xmlns:a14="http://schemas.microsoft.com/office/drawing/2010/main" val="0"/>
+                </a:ext>
+                <a:ext uri="{96DAC541-7B7A-43D3-8B79-37D633B846F1}">
+                  <asvg:svgBlip xmlns:asvg="http://schemas.microsoft.com/office/drawing/2016/SVG/main" r:embed="rId3"/>
+                </a:ext>
+              </a:extLst>
+            </a:blip>
+            <a:stretch>
+              <a:fillRect/>
+            </a:stretch>
+          </p:blipFill>
+          <p:spPr>
+            <a:xfrm>
+              <a:off x="1366168" y="1661203"/>
+              <a:ext cx="457200" cy="457200"/>
+            </a:xfrm>
+            <a:prstGeom prst="rect">
+              <a:avLst/>
+            </a:prstGeom>
+          </p:spPr>
+        </p:pic>
+        <p:sp>
+          <p:nvSpPr>
+            <p:cNvPr id="4" name="TextBox 3">
+              <a:extLst>
+                <a:ext uri="{FF2B5EF4-FFF2-40B4-BE49-F238E27FC236}">
+                  <a16:creationId xmlns:a16="http://schemas.microsoft.com/office/drawing/2014/main" id="{7622EE4B-DA9E-9816-3774-D28A2E6076C2}"/>
+                </a:ext>
+              </a:extLst>
+            </p:cNvPr>
+            <p:cNvSpPr txBox="1"/>
+            <p:nvPr/>
+          </p:nvSpPr>
+          <p:spPr>
+            <a:xfrm>
+              <a:off x="538663" y="2557661"/>
+              <a:ext cx="1072109" cy="369332"/>
+            </a:xfrm>
+            <a:prstGeom prst="rect">
+              <a:avLst/>
+            </a:prstGeom>
+            <a:noFill/>
+          </p:spPr>
+          <p:txBody>
+            <a:bodyPr wrap="square" rtlCol="0">
+              <a:spAutoFit/>
+            </a:bodyPr>
+            <a:lstStyle/>
+            <a:p>
+              <a:r>
+                <a:rPr lang="en-US" b="1">
+                  <a:solidFill>
+                    <a:schemeClr val="accent2"/>
+                  </a:solidFill>
+                </a:rPr>
+                <a:t>Leader</a:t>
+              </a:r>
+            </a:p>
+          </p:txBody>
+        </p:sp>
+      </p:grpSp>
+      <p:grpSp>
+        <p:nvGrpSpPr>
+          <p:cNvPr id="15" name="Group 14">
             <a:extLst>
               <a:ext uri="{FF2B5EF4-FFF2-40B4-BE49-F238E27FC236}">
-                <a16:creationId xmlns:a16="http://schemas.microsoft.com/office/drawing/2014/main" id="{65DAADAD-E689-4BBB-D4F1-8115B62C08D2}"/>
+                <a16:creationId xmlns:a16="http://schemas.microsoft.com/office/drawing/2014/main" id="{C5780491-5B3B-632B-323B-8198FCBA6C0E}"/>
               </a:ext>
             </a:extLst>
           </p:cNvPr>
-          <p:cNvSpPr txBox="1"/>
+          <p:cNvGrpSpPr/>
           <p:nvPr/>
-        </p:nvSpPr>
-        <p:spPr>
+        </p:nvGrpSpPr>
+        <p:grpSpPr>
           <a:xfrm>
-            <a:off x="6884682" y="5057643"/>
-            <a:ext cx="1387121" cy="369332"/>
+            <a:off x="6336303" y="816824"/>
+            <a:ext cx="2179047" cy="2443315"/>
+            <a:chOff x="6555487" y="751305"/>
+            <a:chExt cx="2179047" cy="2443315"/>
           </a:xfrm>
-          <a:prstGeom prst="rect">
-            <a:avLst/>
-          </a:prstGeom>
-          <a:noFill/>
-        </p:spPr>
-        <p:txBody>
-          <a:bodyPr wrap="square" rtlCol="0">
-            <a:spAutoFit/>
-          </a:bodyPr>
-          <a:lstStyle/>
-          <a:p>
-            <a:r>
-              <a:rPr lang="en-US" b="1" dirty="0">
-                <a:solidFill>
-                  <a:schemeClr val="accent1"/>
-                </a:solidFill>
-              </a:rPr>
-              <a:t>Reviewers</a:t>
-            </a:r>
-            <a:endParaRPr lang="en-US" dirty="0"/>
-          </a:p>
-        </p:txBody>
-      </p:sp>
+        </p:grpSpPr>
+        <p:pic>
+          <p:nvPicPr>
+            <p:cNvPr id="7" name="Graphic 6" descr="User with solid fill">
+              <a:extLst>
+                <a:ext uri="{FF2B5EF4-FFF2-40B4-BE49-F238E27FC236}">
+                  <a16:creationId xmlns:a16="http://schemas.microsoft.com/office/drawing/2014/main" id="{78EE56C4-9B8D-E190-FFFE-EB268FE0A7E0}"/>
+                </a:ext>
+              </a:extLst>
+            </p:cNvPr>
+            <p:cNvPicPr>
+              <a:picLocks noChangeAspect="1"/>
+            </p:cNvPicPr>
+            <p:nvPr/>
+          </p:nvPicPr>
+          <p:blipFill>
+            <a:blip>
+              <a:extLst>
+                <a:ext uri="{28A0092B-C50C-407E-A947-70E740481C1C}">
+                  <a14:useLocalDpi xmlns:a14="http://schemas.microsoft.com/office/drawing/2010/main" val="0"/>
+                </a:ext>
+                <a:ext uri="{96DAC541-7B7A-43D3-8B79-37D633B846F1}">
+                  <asvg:svgBlip xmlns:asvg="http://schemas.microsoft.com/office/drawing/2016/SVG/main" r:embed="rId2"/>
+                </a:ext>
+              </a:extLst>
+            </a:blip>
+            <a:stretch>
+              <a:fillRect/>
+            </a:stretch>
+          </p:blipFill>
+          <p:spPr>
+            <a:xfrm>
+              <a:off x="6555488" y="751305"/>
+              <a:ext cx="1182489" cy="1182489"/>
+            </a:xfrm>
+            <a:prstGeom prst="rect">
+              <a:avLst/>
+            </a:prstGeom>
+          </p:spPr>
+        </p:pic>
+        <p:pic>
+          <p:nvPicPr>
+            <p:cNvPr id="8" name="Graphic 7" descr="User with solid fill">
+              <a:extLst>
+                <a:ext uri="{FF2B5EF4-FFF2-40B4-BE49-F238E27FC236}">
+                  <a16:creationId xmlns:a16="http://schemas.microsoft.com/office/drawing/2014/main" id="{483E87FB-D474-8F86-DAA7-D79A2786BE7D}"/>
+                </a:ext>
+              </a:extLst>
+            </p:cNvPr>
+            <p:cNvPicPr>
+              <a:picLocks noChangeAspect="1"/>
+            </p:cNvPicPr>
+            <p:nvPr/>
+          </p:nvPicPr>
+          <p:blipFill>
+            <a:blip>
+              <a:extLst>
+                <a:ext uri="{28A0092B-C50C-407E-A947-70E740481C1C}">
+                  <a14:useLocalDpi xmlns:a14="http://schemas.microsoft.com/office/drawing/2010/main" val="0"/>
+                </a:ext>
+                <a:ext uri="{96DAC541-7B7A-43D3-8B79-37D633B846F1}">
+                  <asvg:svgBlip xmlns:asvg="http://schemas.microsoft.com/office/drawing/2016/SVG/main" r:embed="rId2"/>
+                </a:ext>
+              </a:extLst>
+            </a:blip>
+            <a:stretch>
+              <a:fillRect/>
+            </a:stretch>
+          </p:blipFill>
+          <p:spPr>
+            <a:xfrm>
+              <a:off x="7552045" y="755826"/>
+              <a:ext cx="1182489" cy="1182489"/>
+            </a:xfrm>
+            <a:prstGeom prst="rect">
+              <a:avLst/>
+            </a:prstGeom>
+          </p:spPr>
+        </p:pic>
+        <p:pic>
+          <p:nvPicPr>
+            <p:cNvPr id="9" name="Graphic 8" descr="User with solid fill">
+              <a:extLst>
+                <a:ext uri="{FF2B5EF4-FFF2-40B4-BE49-F238E27FC236}">
+                  <a16:creationId xmlns:a16="http://schemas.microsoft.com/office/drawing/2014/main" id="{BA9113A0-4C20-0D99-5E50-E5503CAA2338}"/>
+                </a:ext>
+              </a:extLst>
+            </p:cNvPr>
+            <p:cNvPicPr>
+              <a:picLocks noChangeAspect="1"/>
+            </p:cNvPicPr>
+            <p:nvPr/>
+          </p:nvPicPr>
+          <p:blipFill>
+            <a:blip>
+              <a:extLst>
+                <a:ext uri="{28A0092B-C50C-407E-A947-70E740481C1C}">
+                  <a14:useLocalDpi xmlns:a14="http://schemas.microsoft.com/office/drawing/2010/main" val="0"/>
+                </a:ext>
+                <a:ext uri="{96DAC541-7B7A-43D3-8B79-37D633B846F1}">
+                  <asvg:svgBlip xmlns:asvg="http://schemas.microsoft.com/office/drawing/2016/SVG/main" r:embed="rId4"/>
+                </a:ext>
+              </a:extLst>
+            </a:blip>
+            <a:stretch>
+              <a:fillRect/>
+            </a:stretch>
+          </p:blipFill>
+          <p:spPr>
+            <a:xfrm>
+              <a:off x="7552045" y="2008028"/>
+              <a:ext cx="1182489" cy="1182489"/>
+            </a:xfrm>
+            <a:prstGeom prst="rect">
+              <a:avLst/>
+            </a:prstGeom>
+          </p:spPr>
+        </p:pic>
+        <p:pic>
+          <p:nvPicPr>
+            <p:cNvPr id="10" name="Graphic 9" descr="User with solid fill">
+              <a:extLst>
+                <a:ext uri="{FF2B5EF4-FFF2-40B4-BE49-F238E27FC236}">
+                  <a16:creationId xmlns:a16="http://schemas.microsoft.com/office/drawing/2014/main" id="{16BCE283-C8EC-1805-3002-EFBB0EE4EDB4}"/>
+                </a:ext>
+              </a:extLst>
+            </p:cNvPr>
+            <p:cNvPicPr>
+              <a:picLocks noChangeAspect="1"/>
+            </p:cNvPicPr>
+            <p:nvPr/>
+          </p:nvPicPr>
+          <p:blipFill>
+            <a:blip>
+              <a:extLst>
+                <a:ext uri="{28A0092B-C50C-407E-A947-70E740481C1C}">
+                  <a14:useLocalDpi xmlns:a14="http://schemas.microsoft.com/office/drawing/2010/main" val="0"/>
+                </a:ext>
+                <a:ext uri="{96DAC541-7B7A-43D3-8B79-37D633B846F1}">
+                  <asvg:svgBlip xmlns:asvg="http://schemas.microsoft.com/office/drawing/2016/SVG/main" r:embed="rId4"/>
+                </a:ext>
+              </a:extLst>
+            </a:blip>
+            <a:stretch>
+              <a:fillRect/>
+            </a:stretch>
+          </p:blipFill>
+          <p:spPr>
+            <a:xfrm>
+              <a:off x="6555487" y="2012131"/>
+              <a:ext cx="1182489" cy="1182489"/>
+            </a:xfrm>
+            <a:prstGeom prst="rect">
+              <a:avLst/>
+            </a:prstGeom>
+          </p:spPr>
+        </p:pic>
+        <p:sp>
+          <p:nvSpPr>
+            <p:cNvPr id="6" name="TextBox 5">
+              <a:extLst>
+                <a:ext uri="{FF2B5EF4-FFF2-40B4-BE49-F238E27FC236}">
+                  <a16:creationId xmlns:a16="http://schemas.microsoft.com/office/drawing/2014/main" id="{65DAADAD-E689-4BBB-D4F1-8115B62C08D2}"/>
+                </a:ext>
+              </a:extLst>
+            </p:cNvPr>
+            <p:cNvSpPr txBox="1"/>
+            <p:nvPr/>
+          </p:nvSpPr>
+          <p:spPr>
+            <a:xfrm>
+              <a:off x="7016567" y="1826470"/>
+              <a:ext cx="1387121" cy="369332"/>
+            </a:xfrm>
+            <a:prstGeom prst="rect">
+              <a:avLst/>
+            </a:prstGeom>
+            <a:noFill/>
+          </p:spPr>
+          <p:txBody>
+            <a:bodyPr wrap="square" rtlCol="0">
+              <a:spAutoFit/>
+            </a:bodyPr>
+            <a:lstStyle/>
+            <a:p>
+              <a:r>
+                <a:rPr lang="en-US" b="1" dirty="0">
+                  <a:solidFill>
+                    <a:schemeClr val="accent1"/>
+                  </a:solidFill>
+                </a:rPr>
+                <a:t>Reviewers</a:t>
+              </a:r>
+              <a:endParaRPr lang="en-US" dirty="0"/>
+            </a:p>
+          </p:txBody>
+        </p:sp>
+      </p:grpSp>
     </p:spTree>
     <p:extLst>
       <p:ext uri="{BB962C8B-B14F-4D97-AF65-F5344CB8AC3E}">
@@ -8945,6 +9241,9 @@
                     <p:cTn id="3" fill="hold">
                       <p:stCondLst>
                         <p:cond delay="indefinite"/>
+                        <p:cond evt="onBegin" delay="0">
+                          <p:tn val="2"/>
+                        </p:cond>
                       </p:stCondLst>
                       <p:childTnLst>
                         <p:par>
@@ -8954,7 +9253,7 @@
                             </p:stCondLst>
                             <p:childTnLst>
                               <p:par>
-                                <p:cTn id="5" presetID="12" presetClass="entr" presetSubtype="8" fill="hold" nodeType="clickEffect">
+                                <p:cTn id="5" presetID="12" presetClass="entr" presetSubtype="8" fill="hold" nodeType="withEffect">
                                   <p:stCondLst>
                                     <p:cond delay="0"/>
                                   </p:stCondLst>
@@ -9145,7 +9444,7 @@
                                         <p:tgtEl>
                                           <p:spTgt spid="12">
                                             <p:txEl>
-                                              <p:pRg st="0" end="0"/>
+                                              <p:pRg st="1" end="1"/>
                                             </p:txEl>
                                           </p:spTgt>
                                         </p:tgtEl>
@@ -9163,7 +9462,7 @@
                                         <p:tgtEl>
                                           <p:spTgt spid="12">
                                             <p:txEl>
-                                              <p:pRg st="0" end="0"/>
+                                              <p:pRg st="1" end="1"/>
                                             </p:txEl>
                                           </p:spTgt>
                                         </p:tgtEl>
@@ -9190,7 +9489,7 @@
                                         <p:tgtEl>
                                           <p:spTgt spid="12">
                                             <p:txEl>
-                                              <p:pRg st="0" end="0"/>
+                                              <p:pRg st="1" end="1"/>
                                             </p:txEl>
                                           </p:spTgt>
                                         </p:tgtEl>
@@ -9391,7 +9690,7 @@
                                         <p:tgtEl>
                                           <p:spTgt spid="12">
                                             <p:txEl>
-                                              <p:pRg st="1" end="1"/>
+                                              <p:pRg st="2" end="2"/>
                                             </p:txEl>
                                           </p:spTgt>
                                         </p:tgtEl>
@@ -9409,7 +9708,7 @@
                                         <p:tgtEl>
                                           <p:spTgt spid="12">
                                             <p:txEl>
-                                              <p:pRg st="1" end="1"/>
+                                              <p:pRg st="2" end="2"/>
                                             </p:txEl>
                                           </p:spTgt>
                                         </p:tgtEl>
@@ -9436,7 +9735,7 @@
                                         <p:tgtEl>
                                           <p:spTgt spid="12">
                                             <p:txEl>
-                                              <p:pRg st="1" end="1"/>
+                                              <p:pRg st="2" end="2"/>
                                             </p:txEl>
                                           </p:spTgt>
                                         </p:tgtEl>
@@ -9461,7 +9760,7 @@
                                         <p:tgtEl>
                                           <p:spTgt spid="12">
                                             <p:txEl>
-                                              <p:pRg st="2" end="2"/>
+                                              <p:pRg st="3" end="3"/>
                                             </p:txEl>
                                           </p:spTgt>
                                         </p:tgtEl>
@@ -9479,7 +9778,7 @@
                                         <p:tgtEl>
                                           <p:spTgt spid="12">
                                             <p:txEl>
-                                              <p:pRg st="2" end="2"/>
+                                              <p:pRg st="3" end="3"/>
                                             </p:txEl>
                                           </p:spTgt>
                                         </p:tgtEl>
@@ -9506,7 +9805,7 @@
                                         <p:tgtEl>
                                           <p:spTgt spid="12">
                                             <p:txEl>
-                                              <p:pRg st="2" end="2"/>
+                                              <p:pRg st="3" end="3"/>
                                             </p:txEl>
                                           </p:spTgt>
                                         </p:tgtEl>
@@ -9795,7 +10094,7 @@
                                         <p:tgtEl>
                                           <p:spTgt spid="12">
                                             <p:txEl>
-                                              <p:pRg st="3" end="3"/>
+                                              <p:pRg st="6" end="6"/>
                                             </p:txEl>
                                           </p:spTgt>
                                         </p:tgtEl>
@@ -9813,7 +10112,7 @@
                                         <p:tgtEl>
                                           <p:spTgt spid="12">
                                             <p:txEl>
-                                              <p:pRg st="3" end="3"/>
+                                              <p:pRg st="6" end="6"/>
                                             </p:txEl>
                                           </p:spTgt>
                                         </p:tgtEl>
@@ -9840,7 +10139,7 @@
                                         <p:tgtEl>
                                           <p:spTgt spid="12">
                                             <p:txEl>
-                                              <p:pRg st="3" end="3"/>
+                                              <p:pRg st="6" end="6"/>
                                             </p:txEl>
                                           </p:spTgt>
                                         </p:tgtEl>
@@ -9865,7 +10164,7 @@
                                         <p:tgtEl>
                                           <p:spTgt spid="12">
                                             <p:txEl>
-                                              <p:pRg st="4" end="4"/>
+                                              <p:pRg st="7" end="7"/>
                                             </p:txEl>
                                           </p:spTgt>
                                         </p:tgtEl>
@@ -9883,7 +10182,7 @@
                                         <p:tgtEl>
                                           <p:spTgt spid="12">
                                             <p:txEl>
-                                              <p:pRg st="4" end="4"/>
+                                              <p:pRg st="7" end="7"/>
                                             </p:txEl>
                                           </p:spTgt>
                                         </p:tgtEl>
@@ -9910,7 +10209,7 @@
                                         <p:tgtEl>
                                           <p:spTgt spid="12">
                                             <p:txEl>
-                                              <p:pRg st="4" end="4"/>
+                                              <p:pRg st="7" end="7"/>
                                             </p:txEl>
                                           </p:spTgt>
                                         </p:tgtEl>
@@ -9935,7 +10234,7 @@
                                         <p:tgtEl>
                                           <p:spTgt spid="12">
                                             <p:txEl>
-                                              <p:pRg st="5" end="5"/>
+                                              <p:pRg st="8" end="8"/>
                                             </p:txEl>
                                           </p:spTgt>
                                         </p:tgtEl>
@@ -9953,7 +10252,7 @@
                                         <p:tgtEl>
                                           <p:spTgt spid="12">
                                             <p:txEl>
-                                              <p:pRg st="5" end="5"/>
+                                              <p:pRg st="8" end="8"/>
                                             </p:txEl>
                                           </p:spTgt>
                                         </p:tgtEl>
@@ -9980,7 +10279,7 @@
                                         <p:tgtEl>
                                           <p:spTgt spid="12">
                                             <p:txEl>
-                                              <p:pRg st="5" end="5"/>
+                                              <p:pRg st="8" end="8"/>
                                             </p:txEl>
                                           </p:spTgt>
                                         </p:tgtEl>
@@ -9989,33 +10288,15 @@
                                   </p:childTnLst>
                                 </p:cTn>
                               </p:par>
-                            </p:childTnLst>
-                          </p:cTn>
-                        </p:par>
-                      </p:childTnLst>
-                    </p:cTn>
-                  </p:par>
-                  <p:par>
-                    <p:cTn id="71" fill="hold">
-                      <p:stCondLst>
-                        <p:cond delay="indefinite"/>
-                      </p:stCondLst>
-                      <p:childTnLst>
-                        <p:par>
-                          <p:cTn id="72" fill="hold">
-                            <p:stCondLst>
-                              <p:cond delay="0"/>
-                            </p:stCondLst>
-                            <p:childTnLst>
                               <p:par>
-                                <p:cTn id="73" presetID="12" presetClass="entr" presetSubtype="8" fill="hold" nodeType="clickEffect">
+                                <p:cTn id="71" presetID="12" presetClass="entr" presetSubtype="8" fill="hold" nodeType="withEffect">
                                   <p:stCondLst>
                                     <p:cond delay="0"/>
                                   </p:stCondLst>
                                   <p:childTnLst>
                                     <p:set>
                                       <p:cBhvr>
-                                        <p:cTn id="74" dur="1" fill="hold">
+                                        <p:cTn id="72" dur="1" fill="hold">
                                           <p:stCondLst>
                                             <p:cond delay="0"/>
                                           </p:stCondLst>
@@ -10023,7 +10304,7 @@
                                         <p:tgtEl>
                                           <p:spTgt spid="11">
                                             <p:txEl>
-                                              <p:pRg st="7" end="7"/>
+                                              <p:pRg st="8" end="8"/>
                                             </p:txEl>
                                           </p:spTgt>
                                         </p:tgtEl>
@@ -10037,11 +10318,11 @@
                                     </p:set>
                                     <p:anim calcmode="lin" valueType="num">
                                       <p:cBhvr additive="base">
-                                        <p:cTn id="75" dur="500"/>
+                                        <p:cTn id="73" dur="500"/>
                                         <p:tgtEl>
                                           <p:spTgt spid="11">
                                             <p:txEl>
-                                              <p:pRg st="7" end="7"/>
+                                              <p:pRg st="8" end="8"/>
                                             </p:txEl>
                                           </p:spTgt>
                                         </p:tgtEl>
@@ -10064,11 +10345,11 @@
                                     </p:anim>
                                     <p:animEffect transition="in" filter="wipe(right)">
                                       <p:cBhvr>
-                                        <p:cTn id="76" dur="500"/>
+                                        <p:cTn id="74" dur="500"/>
                                         <p:tgtEl>
                                           <p:spTgt spid="11">
                                             <p:txEl>
-                                              <p:pRg st="7" end="7"/>
+                                              <p:pRg st="8" end="8"/>
                                             </p:txEl>
                                           </p:spTgt>
                                         </p:tgtEl>
@@ -10152,7 +10433,7 @@
           <a:lstStyle/>
           <a:p>
             <a:r>
-              <a:rPr lang="en-US" dirty="0"/>
+              <a:rPr lang="en-US"/>
               <a:t>Key Points</a:t>
             </a:r>
           </a:p>
@@ -10173,13 +10454,13 @@
           <p:nvPr/>
         </p:nvPicPr>
         <p:blipFill>
-          <a:blip r:embed="rId2">
+          <a:blip>
             <a:extLst>
               <a:ext uri="{28A0092B-C50C-407E-A947-70E740481C1C}">
                 <a14:useLocalDpi xmlns:a14="http://schemas.microsoft.com/office/drawing/2010/main" val="0"/>
               </a:ext>
               <a:ext uri="{96DAC541-7B7A-43D3-8B79-37D633B846F1}">
-                <asvg:svgBlip xmlns:asvg="http://schemas.microsoft.com/office/drawing/2016/SVG/main" r:embed="rId3"/>
+                <asvg:svgBlip xmlns:asvg="http://schemas.microsoft.com/office/drawing/2016/SVG/main" r:embed="rId2"/>
               </a:ext>
             </a:extLst>
           </a:blip>
@@ -10231,7 +10512,7 @@
           <a:lstStyle/>
           <a:p>
             <a:pPr algn="ctr"/>
-            <a:endParaRPr lang="en-US" sz="2000" dirty="0">
+            <a:endParaRPr lang="en-US" sz="2000">
               <a:solidFill>
                 <a:srgbClr val="716557"/>
               </a:solidFill>
@@ -10256,13 +10537,13 @@
           <p:nvPr/>
         </p:nvPicPr>
         <p:blipFill>
-          <a:blip r:embed="rId4">
+          <a:blip>
             <a:extLst>
               <a:ext uri="{28A0092B-C50C-407E-A947-70E740481C1C}">
                 <a14:useLocalDpi xmlns:a14="http://schemas.microsoft.com/office/drawing/2010/main" val="0"/>
               </a:ext>
               <a:ext uri="{96DAC541-7B7A-43D3-8B79-37D633B846F1}">
-                <asvg:svgBlip xmlns:asvg="http://schemas.microsoft.com/office/drawing/2016/SVG/main" r:embed="rId5"/>
+                <asvg:svgBlip xmlns:asvg="http://schemas.microsoft.com/office/drawing/2016/SVG/main" r:embed="rId3"/>
               </a:ext>
             </a:extLst>
           </a:blip>
@@ -10319,7 +10600,7 @@
               <a:buAutoNum type="arabicPeriod"/>
             </a:pPr>
             <a:r>
-              <a:rPr lang="en-US" sz="2000" b="1" dirty="0">
+              <a:rPr lang="en-US" sz="2000" b="1">
                 <a:solidFill>
                   <a:schemeClr val="accent2"/>
                 </a:solidFill>
@@ -10339,7 +10620,7 @@
               <a:buAutoNum type="arabicPeriod"/>
             </a:pPr>
             <a:r>
-              <a:rPr lang="en-US" sz="2000" b="1" dirty="0">
+              <a:rPr lang="en-US" sz="2000" b="1">
                 <a:solidFill>
                   <a:schemeClr val="accent2"/>
                 </a:solidFill>
@@ -10359,7 +10640,7 @@
               <a:buAutoNum type="arabicPeriod"/>
             </a:pPr>
             <a:r>
-              <a:rPr lang="en-US" sz="2000" b="1" dirty="0">
+              <a:rPr lang="en-US" sz="2000" b="1">
                 <a:solidFill>
                   <a:schemeClr val="accent2"/>
                 </a:solidFill>
@@ -10379,7 +10660,7 @@
               <a:buAutoNum type="arabicPeriod"/>
             </a:pPr>
             <a:r>
-              <a:rPr lang="en-US" sz="2000" b="1" dirty="0">
+              <a:rPr lang="en-US" sz="2000" b="1">
                 <a:solidFill>
                   <a:schemeClr val="accent2"/>
                 </a:solidFill>
@@ -10399,7 +10680,7 @@
               <a:buAutoNum type="arabicPeriod"/>
             </a:pPr>
             <a:r>
-              <a:rPr lang="en-US" sz="2000" b="1" dirty="0">
+              <a:rPr lang="en-US" sz="2000" b="1">
                 <a:solidFill>
                   <a:schemeClr val="accent2"/>
                 </a:solidFill>
@@ -10419,7 +10700,7 @@
               <a:buAutoNum type="arabicPeriod"/>
             </a:pPr>
             <a:r>
-              <a:rPr lang="en-US" sz="2000" b="1" dirty="0">
+              <a:rPr lang="en-US" sz="2000" b="1">
                 <a:solidFill>
                   <a:schemeClr val="accent2"/>
                 </a:solidFill>
@@ -10439,7 +10720,7 @@
               <a:buAutoNum type="arabicPeriod"/>
             </a:pPr>
             <a:r>
-              <a:rPr lang="en-US" sz="2000" b="1" dirty="0">
+              <a:rPr lang="en-US" sz="2000" b="1">
                 <a:solidFill>
                   <a:schemeClr val="accent2"/>
                 </a:solidFill>
@@ -10459,7 +10740,7 @@
               <a:buAutoNum type="arabicPeriod"/>
             </a:pPr>
             <a:r>
-              <a:rPr lang="en-US" sz="2000" b="1" dirty="0">
+              <a:rPr lang="en-US" sz="2000" b="1">
                 <a:solidFill>
                   <a:schemeClr val="accent2"/>
                 </a:solidFill>
@@ -10484,13 +10765,13 @@
           <p:nvPr/>
         </p:nvPicPr>
         <p:blipFill>
-          <a:blip r:embed="rId2">
+          <a:blip>
             <a:extLst>
               <a:ext uri="{28A0092B-C50C-407E-A947-70E740481C1C}">
                 <a14:useLocalDpi xmlns:a14="http://schemas.microsoft.com/office/drawing/2010/main" val="0"/>
               </a:ext>
               <a:ext uri="{96DAC541-7B7A-43D3-8B79-37D633B846F1}">
-                <asvg:svgBlip xmlns:asvg="http://schemas.microsoft.com/office/drawing/2016/SVG/main" r:embed="rId3"/>
+                <asvg:svgBlip xmlns:asvg="http://schemas.microsoft.com/office/drawing/2016/SVG/main" r:embed="rId2"/>
               </a:ext>
             </a:extLst>
           </a:blip>
@@ -10523,13 +10804,13 @@
           <p:nvPr/>
         </p:nvPicPr>
         <p:blipFill>
-          <a:blip r:embed="rId2">
+          <a:blip>
             <a:extLst>
               <a:ext uri="{28A0092B-C50C-407E-A947-70E740481C1C}">
                 <a14:useLocalDpi xmlns:a14="http://schemas.microsoft.com/office/drawing/2010/main" val="0"/>
               </a:ext>
               <a:ext uri="{96DAC541-7B7A-43D3-8B79-37D633B846F1}">
-                <asvg:svgBlip xmlns:asvg="http://schemas.microsoft.com/office/drawing/2016/SVG/main" r:embed="rId3"/>
+                <asvg:svgBlip xmlns:asvg="http://schemas.microsoft.com/office/drawing/2016/SVG/main" r:embed="rId2"/>
               </a:ext>
             </a:extLst>
           </a:blip>
@@ -10562,13 +10843,13 @@
           <p:nvPr/>
         </p:nvPicPr>
         <p:blipFill>
-          <a:blip r:embed="rId6">
+          <a:blip>
             <a:extLst>
               <a:ext uri="{28A0092B-C50C-407E-A947-70E740481C1C}">
                 <a14:useLocalDpi xmlns:a14="http://schemas.microsoft.com/office/drawing/2010/main" val="0"/>
               </a:ext>
               <a:ext uri="{96DAC541-7B7A-43D3-8B79-37D633B846F1}">
-                <asvg:svgBlip xmlns:asvg="http://schemas.microsoft.com/office/drawing/2016/SVG/main" r:embed="rId7"/>
+                <asvg:svgBlip xmlns:asvg="http://schemas.microsoft.com/office/drawing/2016/SVG/main" r:embed="rId4"/>
               </a:ext>
             </a:extLst>
           </a:blip>
@@ -10601,13 +10882,13 @@
           <p:nvPr/>
         </p:nvPicPr>
         <p:blipFill>
-          <a:blip r:embed="rId6">
+          <a:blip>
             <a:extLst>
               <a:ext uri="{28A0092B-C50C-407E-A947-70E740481C1C}">
                 <a14:useLocalDpi xmlns:a14="http://schemas.microsoft.com/office/drawing/2010/main" val="0"/>
               </a:ext>
               <a:ext uri="{96DAC541-7B7A-43D3-8B79-37D633B846F1}">
-                <asvg:svgBlip xmlns:asvg="http://schemas.microsoft.com/office/drawing/2016/SVG/main" r:embed="rId7"/>
+                <asvg:svgBlip xmlns:asvg="http://schemas.microsoft.com/office/drawing/2016/SVG/main" r:embed="rId4"/>
               </a:ext>
             </a:extLst>
           </a:blip>
@@ -10640,10 +10921,10 @@
           <p:nvPr/>
         </p:nvPicPr>
         <p:blipFill>
-          <a:blip r:embed="rId8">
+          <a:blip>
             <a:extLst>
               <a:ext uri="{96DAC541-7B7A-43D3-8B79-37D633B846F1}">
-                <asvg:svgBlip xmlns:asvg="http://schemas.microsoft.com/office/drawing/2016/SVG/main" r:embed="rId9"/>
+                <asvg:svgBlip xmlns:asvg="http://schemas.microsoft.com/office/drawing/2016/SVG/main" r:embed="rId5"/>
               </a:ext>
             </a:extLst>
           </a:blip>
@@ -11582,7 +11863,7 @@
           <a:lstStyle/>
           <a:p>
             <a:pPr algn="ctr"/>
-            <a:endParaRPr lang="en-US" sz="2000" dirty="0">
+            <a:endParaRPr lang="en-US" sz="2000">
               <a:solidFill>
                 <a:srgbClr val="716557"/>
               </a:solidFill>
@@ -11635,7 +11916,7 @@
           <a:lstStyle/>
           <a:p>
             <a:pPr algn="ctr"/>
-            <a:endParaRPr lang="en-US" sz="6000" b="1" dirty="0">
+            <a:endParaRPr lang="en-US" sz="6000" b="1">
               <a:solidFill>
                 <a:schemeClr val="bg2"/>
               </a:solidFill>
@@ -11690,7 +11971,7 @@
               <a:defRPr/>
             </a:pPr>
             <a:r>
-              <a:rPr kumimoji="0" lang="en-US" sz="6000" b="1" i="0" u="none" strike="noStrike" kern="1200" cap="none" spc="0" normalizeH="0" baseline="0" noProof="0" dirty="0">
+              <a:rPr kumimoji="0" lang="en-US" sz="6000" b="1" i="0" u="none" strike="noStrike" kern="1200" cap="none" spc="0" normalizeH="0" baseline="0" noProof="0">
                 <a:ln>
                   <a:noFill/>
                 </a:ln>
@@ -12498,23 +12779,8 @@
 </file>
 
 <file path=customXml/item1.xml><?xml version="1.0" encoding="utf-8"?>
-<?mso-contentType ?>
-<FormTemplates xmlns="http://schemas.microsoft.com/sharepoint/v3/contenttype/forms">
-  <Display>DocumentLibraryForm</Display>
-  <Edit>DocumentLibraryForm</Edit>
-  <New>DocumentLibraryForm</New>
-</FormTemplates>
-</file>
-
-<file path=customXml/item2.xml><?xml version="1.0" encoding="utf-8"?>
-<p:properties xmlns:p="http://schemas.microsoft.com/office/2006/metadata/properties" xmlns:xsi="http://www.w3.org/2001/XMLSchema-instance" xmlns:pc="http://schemas.microsoft.com/office/infopath/2007/PartnerControls">
-  <documentManagement/>
-</p:properties>
-</file>
-
-<file path=customXml/item3.xml><?xml version="1.0" encoding="utf-8"?>
-<ct:contentTypeSchema xmlns:ct="http://schemas.microsoft.com/office/2006/metadata/contentType" xmlns:ma="http://schemas.microsoft.com/office/2006/metadata/properties/metaAttributes" ct:_="" ma:_="" ma:contentTypeName="Document" ma:contentTypeID="0x0101002F017C5ECD5AE84588140775F5D9B6FC" ma:contentTypeVersion="10" ma:contentTypeDescription="Create a new document." ma:contentTypeScope="" ma:versionID="3fff9ed69b78a1d1c48e3f96068d2b17">
-  <xsd:schema xmlns:xsd="http://www.w3.org/2001/XMLSchema" xmlns:xs="http://www.w3.org/2001/XMLSchema" xmlns:p="http://schemas.microsoft.com/office/2006/metadata/properties" xmlns:ns2="fee82e44-1fa4-4144-8309-00fed2bf4198" xmlns:ns3="1a61c928-f5f6-4989-bd5d-cb8872a1b06d" targetNamespace="http://schemas.microsoft.com/office/2006/metadata/properties" ma:root="true" ma:fieldsID="7b2c40b849e0c1cff02f16dd8f1be10b" ns2:_="" ns3:_="">
+<ct:contentTypeSchema xmlns:ct="http://schemas.microsoft.com/office/2006/metadata/contentType" xmlns:ma="http://schemas.microsoft.com/office/2006/metadata/properties/metaAttributes" ct:_="" ma:_="" ma:contentTypeName="Document" ma:contentTypeID="0x0101002F017C5ECD5AE84588140775F5D9B6FC" ma:contentTypeVersion="10" ma:contentTypeDescription="Create a new document." ma:contentTypeScope="" ma:versionID="1a5380cb2be4a51461126b02f947e923">
+  <xsd:schema xmlns:xsd="http://www.w3.org/2001/XMLSchema" xmlns:xs="http://www.w3.org/2001/XMLSchema" xmlns:p="http://schemas.microsoft.com/office/2006/metadata/properties" xmlns:ns2="fee82e44-1fa4-4144-8309-00fed2bf4198" xmlns:ns3="1a61c928-f5f6-4989-bd5d-cb8872a1b06d" targetNamespace="http://schemas.microsoft.com/office/2006/metadata/properties" ma:root="true" ma:fieldsID="9bf58d68fa2085cb5739c341b0c4cacb" ns2:_="" ns3:_="">
     <xsd:import namespace="fee82e44-1fa4-4144-8309-00fed2bf4198"/>
     <xsd:import namespace="1a61c928-f5f6-4989-bd5d-cb8872a1b06d"/>
     <xsd:element name="properties">
@@ -12713,7 +12979,41 @@
 </ct:contentTypeSchema>
 </file>
 
+<file path=customXml/item2.xml><?xml version="1.0" encoding="utf-8"?>
+<?mso-contentType ?>
+<FormTemplates xmlns="http://schemas.microsoft.com/sharepoint/v3/contenttype/forms">
+  <Display>DocumentLibraryForm</Display>
+  <Edit>DocumentLibraryForm</Edit>
+  <New>DocumentLibraryForm</New>
+</FormTemplates>
+</file>
+
+<file path=customXml/item3.xml><?xml version="1.0" encoding="utf-8"?>
+<p:properties xmlns:p="http://schemas.microsoft.com/office/2006/metadata/properties" xmlns:xsi="http://www.w3.org/2001/XMLSchema-instance" xmlns:pc="http://schemas.microsoft.com/office/infopath/2007/PartnerControls">
+  <documentManagement/>
+</p:properties>
+</file>
+
 <file path=customXml/itemProps1.xml><?xml version="1.0" encoding="utf-8"?>
+<ds:datastoreItem xmlns:ds="http://schemas.openxmlformats.org/officeDocument/2006/customXml" ds:itemID="{48B975BD-FF54-421D-AEC7-A8AE09732533}">
+  <ds:schemaRefs>
+    <ds:schemaRef ds:uri="1a61c928-f5f6-4989-bd5d-cb8872a1b06d"/>
+    <ds:schemaRef ds:uri="fee82e44-1fa4-4144-8309-00fed2bf4198"/>
+    <ds:schemaRef ds:uri="http://purl.org/dc/elements/1.1/"/>
+    <ds:schemaRef ds:uri="http://purl.org/dc/terms/"/>
+    <ds:schemaRef ds:uri="http://schemas.microsoft.com/internal/obd"/>
+    <ds:schemaRef ds:uri="http://schemas.microsoft.com/office/2006/documentManagement/types"/>
+    <ds:schemaRef ds:uri="http://schemas.microsoft.com/office/2006/metadata/contentType"/>
+    <ds:schemaRef ds:uri="http://schemas.microsoft.com/office/2006/metadata/properties"/>
+    <ds:schemaRef ds:uri="http://schemas.microsoft.com/office/2006/metadata/properties/metaAttributes"/>
+    <ds:schemaRef ds:uri="http://schemas.microsoft.com/office/infopath/2007/PartnerControls"/>
+    <ds:schemaRef ds:uri="http://schemas.openxmlformats.org/package/2006/metadata/core-properties"/>
+    <ds:schemaRef ds:uri="http://www.w3.org/2001/XMLSchema"/>
+  </ds:schemaRefs>
+</ds:datastoreItem>
+</file>
+
+<file path=customXml/itemProps2.xml><?xml version="1.0" encoding="utf-8"?>
 <ds:datastoreItem xmlns:ds="http://schemas.openxmlformats.org/officeDocument/2006/customXml" ds:itemID="{B178770A-F6AC-406B-AF0D-88CBCF36B701}">
   <ds:schemaRefs>
     <ds:schemaRef ds:uri="http://schemas.microsoft.com/sharepoint/v3/contenttype/forms"/>
@@ -12721,38 +13021,19 @@
 </ds:datastoreItem>
 </file>
 
-<file path=customXml/itemProps2.xml><?xml version="1.0" encoding="utf-8"?>
+<file path=customXml/itemProps3.xml><?xml version="1.0" encoding="utf-8"?>
 <ds:datastoreItem xmlns:ds="http://schemas.openxmlformats.org/officeDocument/2006/customXml" ds:itemID="{DD870300-B03F-45F7-9154-521D8C74684E}">
   <ds:schemaRefs>
+    <ds:schemaRef ds:uri="http://purl.org/dc/elements/1.1/"/>
+    <ds:schemaRef ds:uri="1a61c928-f5f6-4989-bd5d-cb8872a1b06d"/>
+    <ds:schemaRef ds:uri="http://schemas.microsoft.com/office/infopath/2007/PartnerControls"/>
+    <ds:schemaRef ds:uri="http://schemas.openxmlformats.org/package/2006/metadata/core-properties"/>
+    <ds:schemaRef ds:uri="fee82e44-1fa4-4144-8309-00fed2bf4198"/>
+    <ds:schemaRef ds:uri="http://schemas.microsoft.com/office/2006/metadata/properties"/>
     <ds:schemaRef ds:uri="http://schemas.microsoft.com/office/2006/documentManagement/types"/>
+    <ds:schemaRef ds:uri="http://www.w3.org/XML/1998/namespace"/>
     <ds:schemaRef ds:uri="http://purl.org/dc/dcmitype/"/>
     <ds:schemaRef ds:uri="http://purl.org/dc/terms/"/>
-    <ds:schemaRef ds:uri="http://schemas.microsoft.com/office/2006/metadata/properties"/>
-    <ds:schemaRef ds:uri="http://www.w3.org/XML/1998/namespace"/>
-    <ds:schemaRef ds:uri="1a61c928-f5f6-4989-bd5d-cb8872a1b06d"/>
-    <ds:schemaRef ds:uri="http://schemas.openxmlformats.org/package/2006/metadata/core-properties"/>
-    <ds:schemaRef ds:uri="http://purl.org/dc/elements/1.1/"/>
-    <ds:schemaRef ds:uri="http://schemas.microsoft.com/office/infopath/2007/PartnerControls"/>
-    <ds:schemaRef ds:uri="fee82e44-1fa4-4144-8309-00fed2bf4198"/>
-  </ds:schemaRefs>
-</ds:datastoreItem>
-</file>
-
-<file path=customXml/itemProps3.xml><?xml version="1.0" encoding="utf-8"?>
-<ds:datastoreItem xmlns:ds="http://schemas.openxmlformats.org/officeDocument/2006/customXml" ds:itemID="{DBB29CC1-E656-4579-9C50-89BAE49F997D}">
-  <ds:schemaRefs>
-    <ds:schemaRef ds:uri="http://schemas.microsoft.com/office/2006/metadata/contentType"/>
-    <ds:schemaRef ds:uri="http://schemas.microsoft.com/office/2006/metadata/properties/metaAttributes"/>
-    <ds:schemaRef ds:uri="http://www.w3.org/2001/XMLSchema"/>
-    <ds:schemaRef ds:uri="http://schemas.microsoft.com/office/2006/metadata/properties"/>
-    <ds:schemaRef ds:uri="fee82e44-1fa4-4144-8309-00fed2bf4198"/>
-    <ds:schemaRef ds:uri="1a61c928-f5f6-4989-bd5d-cb8872a1b06d"/>
-    <ds:schemaRef ds:uri="http://schemas.microsoft.com/office/2006/documentManagement/types"/>
-    <ds:schemaRef ds:uri="http://schemas.microsoft.com/office/infopath/2007/PartnerControls"/>
-    <ds:schemaRef ds:uri="http://schemas.openxmlformats.org/package/2006/metadata/core-properties"/>
-    <ds:schemaRef ds:uri="http://purl.org/dc/elements/1.1/"/>
-    <ds:schemaRef ds:uri="http://purl.org/dc/terms/"/>
-    <ds:schemaRef ds:uri="http://schemas.microsoft.com/internal/obd"/>
   </ds:schemaRefs>
 </ds:datastoreItem>
 </file>